--- a/2026/2026ThumbnailWhite.pptx
+++ b/2026/2026ThumbnailWhite.pptx
@@ -259,7 +259,7 @@
           <a:p>
             <a:fld id="{3816CC03-B68F-4642-A2B8-7A8633A67F21}" type="datetimeFigureOut">
               <a:rPr lang="en-US" smtClean="0"/>
-              <a:t>12/21/2025</a:t>
+              <a:t>12/23/2025</a:t>
             </a:fld>
             <a:endParaRPr lang="en-US"/>
           </a:p>
@@ -457,7 +457,7 @@
           <a:p>
             <a:fld id="{3816CC03-B68F-4642-A2B8-7A8633A67F21}" type="datetimeFigureOut">
               <a:rPr lang="en-US" smtClean="0"/>
-              <a:t>12/21/2025</a:t>
+              <a:t>12/23/2025</a:t>
             </a:fld>
             <a:endParaRPr lang="en-US"/>
           </a:p>
@@ -665,7 +665,7 @@
           <a:p>
             <a:fld id="{3816CC03-B68F-4642-A2B8-7A8633A67F21}" type="datetimeFigureOut">
               <a:rPr lang="en-US" smtClean="0"/>
-              <a:t>12/21/2025</a:t>
+              <a:t>12/23/2025</a:t>
             </a:fld>
             <a:endParaRPr lang="en-US"/>
           </a:p>
@@ -863,7 +863,7 @@
           <a:p>
             <a:fld id="{3816CC03-B68F-4642-A2B8-7A8633A67F21}" type="datetimeFigureOut">
               <a:rPr lang="en-US" smtClean="0"/>
-              <a:t>12/21/2025</a:t>
+              <a:t>12/23/2025</a:t>
             </a:fld>
             <a:endParaRPr lang="en-US"/>
           </a:p>
@@ -1138,7 +1138,7 @@
           <a:p>
             <a:fld id="{3816CC03-B68F-4642-A2B8-7A8633A67F21}" type="datetimeFigureOut">
               <a:rPr lang="en-US" smtClean="0"/>
-              <a:t>12/21/2025</a:t>
+              <a:t>12/23/2025</a:t>
             </a:fld>
             <a:endParaRPr lang="en-US"/>
           </a:p>
@@ -1403,7 +1403,7 @@
           <a:p>
             <a:fld id="{3816CC03-B68F-4642-A2B8-7A8633A67F21}" type="datetimeFigureOut">
               <a:rPr lang="en-US" smtClean="0"/>
-              <a:t>12/21/2025</a:t>
+              <a:t>12/23/2025</a:t>
             </a:fld>
             <a:endParaRPr lang="en-US"/>
           </a:p>
@@ -1815,7 +1815,7 @@
           <a:p>
             <a:fld id="{3816CC03-B68F-4642-A2B8-7A8633A67F21}" type="datetimeFigureOut">
               <a:rPr lang="en-US" smtClean="0"/>
-              <a:t>12/21/2025</a:t>
+              <a:t>12/23/2025</a:t>
             </a:fld>
             <a:endParaRPr lang="en-US"/>
           </a:p>
@@ -1956,7 +1956,7 @@
           <a:p>
             <a:fld id="{3816CC03-B68F-4642-A2B8-7A8633A67F21}" type="datetimeFigureOut">
               <a:rPr lang="en-US" smtClean="0"/>
-              <a:t>12/21/2025</a:t>
+              <a:t>12/23/2025</a:t>
             </a:fld>
             <a:endParaRPr lang="en-US"/>
           </a:p>
@@ -2141,7 +2141,7 @@
           <a:p>
             <a:fld id="{3816CC03-B68F-4642-A2B8-7A8633A67F21}" type="datetimeFigureOut">
               <a:rPr lang="en-US" smtClean="0"/>
-              <a:t>12/21/2025</a:t>
+              <a:t>12/23/2025</a:t>
             </a:fld>
             <a:endParaRPr lang="en-US"/>
           </a:p>
@@ -2452,7 +2452,7 @@
           <a:p>
             <a:fld id="{3816CC03-B68F-4642-A2B8-7A8633A67F21}" type="datetimeFigureOut">
               <a:rPr lang="en-US" smtClean="0"/>
-              <a:t>12/21/2025</a:t>
+              <a:t>12/23/2025</a:t>
             </a:fld>
             <a:endParaRPr lang="en-US"/>
           </a:p>
@@ -2740,7 +2740,7 @@
           <a:p>
             <a:fld id="{3816CC03-B68F-4642-A2B8-7A8633A67F21}" type="datetimeFigureOut">
               <a:rPr lang="en-US" smtClean="0"/>
-              <a:t>12/21/2025</a:t>
+              <a:t>12/23/2025</a:t>
             </a:fld>
             <a:endParaRPr lang="en-US"/>
           </a:p>
@@ -2981,7 +2981,7 @@
           <a:p>
             <a:fld id="{3816CC03-B68F-4642-A2B8-7A8633A67F21}" type="datetimeFigureOut">
               <a:rPr lang="en-US" smtClean="0"/>
-              <a:t>12/21/2025</a:t>
+              <a:t>12/23/2025</a:t>
             </a:fld>
             <a:endParaRPr lang="en-US"/>
           </a:p>
@@ -3412,8 +3412,8 @@
         </p:nvSpPr>
         <p:spPr>
           <a:xfrm>
-            <a:off x="554258" y="255692"/>
-            <a:ext cx="11083483" cy="2554545"/>
+            <a:off x="458778" y="401996"/>
+            <a:ext cx="9073318" cy="1569660"/>
           </a:xfrm>
           <a:prstGeom prst="rect">
             <a:avLst/>
@@ -3428,1033 +3428,101 @@
           <a:p>
             <a:pPr algn="ctr"/>
             <a:r>
+              <a:rPr lang="en-US" sz="9600" dirty="0">
+                <a:latin typeface="Alice" panose="00000500000000000000" pitchFamily="2" charset="0"/>
+              </a:rPr>
+              <a:t>Reverse Physics</a:t>
+            </a:r>
+          </a:p>
+        </p:txBody>
+      </p:sp>
+      <p:sp>
+        <p:nvSpPr>
+          <p:cNvPr id="2" name="TextBox 1">
+            <a:extLst>
+              <a:ext uri="{FF2B5EF4-FFF2-40B4-BE49-F238E27FC236}">
+                <a16:creationId xmlns:a16="http://schemas.microsoft.com/office/drawing/2014/main" id="{90BAE7F1-2B6C-B176-BC0B-D3DCD1A6F386}"/>
+              </a:ext>
+            </a:extLst>
+          </p:cNvPr>
+          <p:cNvSpPr txBox="1"/>
+          <p:nvPr/>
+        </p:nvSpPr>
+        <p:spPr>
+          <a:xfrm>
+            <a:off x="4310572" y="3550920"/>
+            <a:ext cx="7386959" cy="3046988"/>
+          </a:xfrm>
+          <a:prstGeom prst="rect">
+            <a:avLst/>
+          </a:prstGeom>
+          <a:noFill/>
+        </p:spPr>
+        <p:txBody>
+          <a:bodyPr wrap="none" rtlCol="0">
+            <a:spAutoFit/>
+          </a:bodyPr>
+          <a:lstStyle/>
+          <a:p>
+            <a:pPr algn="ctr"/>
+            <a:r>
+              <a:rPr lang="en-US" sz="9600" dirty="0">
+                <a:latin typeface="Alice" panose="00000500000000000000" pitchFamily="2" charset="0"/>
+              </a:rPr>
+              <a:t>Physical</a:t>
+            </a:r>
+            <a:br>
+              <a:rPr lang="en-US" sz="9600" dirty="0">
+                <a:latin typeface="Alice" panose="00000500000000000000" pitchFamily="2" charset="0"/>
+              </a:rPr>
+            </a:br>
+            <a:r>
+              <a:rPr lang="en-US" sz="9600" dirty="0">
+                <a:latin typeface="Alice" panose="00000500000000000000" pitchFamily="2" charset="0"/>
+              </a:rPr>
+              <a:t>Mathematics</a:t>
+            </a:r>
+          </a:p>
+        </p:txBody>
+      </p:sp>
+      <p:sp>
+        <p:nvSpPr>
+          <p:cNvPr id="27" name="TextBox 26">
+            <a:extLst>
+              <a:ext uri="{FF2B5EF4-FFF2-40B4-BE49-F238E27FC236}">
+                <a16:creationId xmlns:a16="http://schemas.microsoft.com/office/drawing/2014/main" id="{FEEDD86C-A04B-DD81-780C-848C34C95375}"/>
+              </a:ext>
+            </a:extLst>
+          </p:cNvPr>
+          <p:cNvSpPr txBox="1"/>
+          <p:nvPr/>
+        </p:nvSpPr>
+        <p:spPr>
+          <a:xfrm>
+            <a:off x="4617796" y="2105561"/>
+            <a:ext cx="1907895" cy="1323439"/>
+          </a:xfrm>
+          <a:prstGeom prst="rect">
+            <a:avLst/>
+          </a:prstGeom>
+          <a:noFill/>
+        </p:spPr>
+        <p:txBody>
+          <a:bodyPr wrap="none" rtlCol="0">
+            <a:spAutoFit/>
+          </a:bodyPr>
+          <a:lstStyle/>
+          <a:p>
+            <a:pPr algn="ctr"/>
+            <a:r>
               <a:rPr lang="en-US" sz="8000" dirty="0">
                 <a:latin typeface="Alice" panose="00000500000000000000" pitchFamily="2" charset="0"/>
               </a:rPr>
-              <a:t>Assumptions of Physics</a:t>
-            </a:r>
-          </a:p>
-          <a:p>
-            <a:pPr algn="ctr"/>
-            <a:r>
-              <a:rPr lang="en-US" sz="8000" dirty="0">
-                <a:latin typeface="Alice" panose="00000500000000000000" pitchFamily="2" charset="0"/>
-              </a:rPr>
-              <a:t>2025-26 overview</a:t>
-            </a:r>
-          </a:p>
-        </p:txBody>
-      </p:sp>
-      <p:grpSp>
-        <p:nvGrpSpPr>
-          <p:cNvPr id="4" name="Group 3">
-            <a:extLst>
-              <a:ext uri="{FF2B5EF4-FFF2-40B4-BE49-F238E27FC236}">
-                <a16:creationId xmlns:a16="http://schemas.microsoft.com/office/drawing/2014/main" id="{8383BABC-39B1-5A30-2092-41FE566F0B02}"/>
-              </a:ext>
-            </a:extLst>
-          </p:cNvPr>
-          <p:cNvGrpSpPr/>
-          <p:nvPr/>
-        </p:nvGrpSpPr>
-        <p:grpSpPr>
-          <a:xfrm>
-            <a:off x="3127505" y="3054949"/>
-            <a:ext cx="8628670" cy="3527478"/>
-            <a:chOff x="795348" y="3429000"/>
-            <a:chExt cx="6782375" cy="2772696"/>
-          </a:xfrm>
-        </p:grpSpPr>
-        <p:cxnSp>
-          <p:nvCxnSpPr>
-            <p:cNvPr id="5" name="Straight Arrow Connector 4">
-              <a:extLst>
-                <a:ext uri="{FF2B5EF4-FFF2-40B4-BE49-F238E27FC236}">
-                  <a16:creationId xmlns:a16="http://schemas.microsoft.com/office/drawing/2014/main" id="{35CFB8D1-7437-D65F-20CD-8D96F6644258}"/>
-                </a:ext>
-              </a:extLst>
-            </p:cNvPr>
-            <p:cNvCxnSpPr>
-              <a:stCxn id="6" idx="3"/>
-              <a:endCxn id="12" idx="1"/>
-            </p:cNvCxnSpPr>
-            <p:nvPr/>
-          </p:nvCxnSpPr>
-          <p:spPr>
-            <a:xfrm flipV="1">
-              <a:off x="4447402" y="3924220"/>
-              <a:ext cx="600055" cy="6500"/>
-            </a:xfrm>
-            <a:prstGeom prst="straightConnector1">
-              <a:avLst/>
-            </a:prstGeom>
-            <a:ln>
-              <a:prstDash val="lgDash"/>
-              <a:tailEnd type="triangle"/>
-            </a:ln>
-          </p:spPr>
-          <p:style>
-            <a:lnRef idx="1">
-              <a:schemeClr val="accent6"/>
-            </a:lnRef>
-            <a:fillRef idx="0">
-              <a:schemeClr val="accent6"/>
-            </a:fillRef>
-            <a:effectRef idx="0">
-              <a:schemeClr val="accent6"/>
-            </a:effectRef>
-            <a:fontRef idx="minor">
-              <a:schemeClr val="tx1"/>
-            </a:fontRef>
-          </p:style>
-        </p:cxnSp>
-        <p:sp>
-          <p:nvSpPr>
-            <p:cNvPr id="6" name="Rectangle 5">
-              <a:extLst>
-                <a:ext uri="{FF2B5EF4-FFF2-40B4-BE49-F238E27FC236}">
-                  <a16:creationId xmlns:a16="http://schemas.microsoft.com/office/drawing/2014/main" id="{BAAC9EB1-4C71-6D42-E9B5-C2822A9C5AF6}"/>
-                </a:ext>
-              </a:extLst>
-            </p:cNvPr>
-            <p:cNvSpPr/>
-            <p:nvPr/>
-          </p:nvSpPr>
-          <p:spPr>
-            <a:xfrm>
-              <a:off x="2683017" y="3700988"/>
-              <a:ext cx="1764385" cy="459464"/>
-            </a:xfrm>
-            <a:prstGeom prst="rect">
-              <a:avLst/>
-            </a:prstGeom>
-          </p:spPr>
-          <p:style>
-            <a:lnRef idx="2">
-              <a:schemeClr val="accent1">
-                <a:shade val="50000"/>
-              </a:schemeClr>
-            </a:lnRef>
-            <a:fillRef idx="1">
-              <a:schemeClr val="accent1"/>
-            </a:fillRef>
-            <a:effectRef idx="0">
-              <a:schemeClr val="accent1"/>
-            </a:effectRef>
-            <a:fontRef idx="minor">
-              <a:schemeClr val="lt1"/>
-            </a:fontRef>
-          </p:style>
-          <p:txBody>
-            <a:bodyPr rtlCol="0" anchor="ctr"/>
-            <a:lstStyle/>
-            <a:p>
-              <a:pPr algn="ctr"/>
-              <a:r>
-                <a:rPr lang="en-US" sz="1400" dirty="0"/>
-                <a:t>General physical principles and requirements</a:t>
-              </a:r>
-            </a:p>
-          </p:txBody>
-        </p:sp>
-        <p:cxnSp>
-          <p:nvCxnSpPr>
-            <p:cNvPr id="7" name="Straight Arrow Connector 6">
-              <a:extLst>
-                <a:ext uri="{FF2B5EF4-FFF2-40B4-BE49-F238E27FC236}">
-                  <a16:creationId xmlns:a16="http://schemas.microsoft.com/office/drawing/2014/main" id="{6508AB07-22E4-7CE1-50ED-2FD62D753391}"/>
-                </a:ext>
-              </a:extLst>
-            </p:cNvPr>
-            <p:cNvCxnSpPr>
-              <a:stCxn id="10" idx="3"/>
-              <a:endCxn id="23" idx="1"/>
-            </p:cNvCxnSpPr>
-            <p:nvPr/>
-          </p:nvCxnSpPr>
-          <p:spPr>
-            <a:xfrm>
-              <a:off x="4149071" y="4685566"/>
-              <a:ext cx="607793" cy="888015"/>
-            </a:xfrm>
-            <a:prstGeom prst="straightConnector1">
-              <a:avLst/>
-            </a:prstGeom>
-            <a:ln>
-              <a:prstDash val="lgDash"/>
-              <a:tailEnd type="triangle"/>
-            </a:ln>
-          </p:spPr>
-          <p:style>
-            <a:lnRef idx="1">
-              <a:schemeClr val="accent6"/>
-            </a:lnRef>
-            <a:fillRef idx="0">
-              <a:schemeClr val="accent6"/>
-            </a:fillRef>
-            <a:effectRef idx="0">
-              <a:schemeClr val="accent6"/>
-            </a:effectRef>
-            <a:fontRef idx="minor">
-              <a:schemeClr val="tx1"/>
-            </a:fontRef>
-          </p:style>
-        </p:cxnSp>
-        <p:cxnSp>
-          <p:nvCxnSpPr>
-            <p:cNvPr id="8" name="Straight Arrow Connector 7">
-              <a:extLst>
-                <a:ext uri="{FF2B5EF4-FFF2-40B4-BE49-F238E27FC236}">
-                  <a16:creationId xmlns:a16="http://schemas.microsoft.com/office/drawing/2014/main" id="{063A8D3C-2C69-A8DB-1B2B-2B6AA8A71FD5}"/>
-                </a:ext>
-              </a:extLst>
-            </p:cNvPr>
-            <p:cNvCxnSpPr>
-              <a:stCxn id="10" idx="3"/>
-              <a:endCxn id="22" idx="1"/>
-            </p:cNvCxnSpPr>
-            <p:nvPr/>
-          </p:nvCxnSpPr>
-          <p:spPr>
-            <a:xfrm>
-              <a:off x="4149071" y="4685566"/>
-              <a:ext cx="2314337" cy="92471"/>
-            </a:xfrm>
-            <a:prstGeom prst="straightConnector1">
-              <a:avLst/>
-            </a:prstGeom>
-            <a:ln>
-              <a:prstDash val="lgDash"/>
-              <a:tailEnd type="triangle"/>
-            </a:ln>
-          </p:spPr>
-          <p:style>
-            <a:lnRef idx="1">
-              <a:schemeClr val="accent6"/>
-            </a:lnRef>
-            <a:fillRef idx="0">
-              <a:schemeClr val="accent6"/>
-            </a:fillRef>
-            <a:effectRef idx="0">
-              <a:schemeClr val="accent6"/>
-            </a:effectRef>
-            <a:fontRef idx="minor">
-              <a:schemeClr val="tx1"/>
-            </a:fontRef>
-          </p:style>
-        </p:cxnSp>
-        <p:cxnSp>
-          <p:nvCxnSpPr>
-            <p:cNvPr id="9" name="Straight Arrow Connector 8">
-              <a:extLst>
-                <a:ext uri="{FF2B5EF4-FFF2-40B4-BE49-F238E27FC236}">
-                  <a16:creationId xmlns:a16="http://schemas.microsoft.com/office/drawing/2014/main" id="{D8B067EA-E56E-ECFB-ECF5-444889381D66}"/>
-                </a:ext>
-              </a:extLst>
-            </p:cNvPr>
-            <p:cNvCxnSpPr>
-              <a:stCxn id="10" idx="3"/>
-              <a:endCxn id="24" idx="1"/>
-            </p:cNvCxnSpPr>
-            <p:nvPr/>
-          </p:nvCxnSpPr>
-          <p:spPr>
-            <a:xfrm>
-              <a:off x="4149071" y="4685566"/>
-              <a:ext cx="2380161" cy="828736"/>
-            </a:xfrm>
-            <a:prstGeom prst="straightConnector1">
-              <a:avLst/>
-            </a:prstGeom>
-            <a:ln>
-              <a:prstDash val="lgDash"/>
-              <a:tailEnd type="triangle"/>
-            </a:ln>
-          </p:spPr>
-          <p:style>
-            <a:lnRef idx="1">
-              <a:schemeClr val="accent6"/>
-            </a:lnRef>
-            <a:fillRef idx="0">
-              <a:schemeClr val="accent6"/>
-            </a:fillRef>
-            <a:effectRef idx="0">
-              <a:schemeClr val="accent6"/>
-            </a:effectRef>
-            <a:fontRef idx="minor">
-              <a:schemeClr val="tx1"/>
-            </a:fontRef>
-          </p:style>
-        </p:cxnSp>
-        <p:sp>
-          <p:nvSpPr>
-            <p:cNvPr id="10" name="Rectangle 9">
-              <a:extLst>
-                <a:ext uri="{FF2B5EF4-FFF2-40B4-BE49-F238E27FC236}">
-                  <a16:creationId xmlns:a16="http://schemas.microsoft.com/office/drawing/2014/main" id="{4481CAEC-7AB0-D811-F50C-00FEC7EDE830}"/>
-                </a:ext>
-              </a:extLst>
-            </p:cNvPr>
-            <p:cNvSpPr/>
-            <p:nvPr/>
-          </p:nvSpPr>
-          <p:spPr>
-            <a:xfrm>
-              <a:off x="2735405" y="4529583"/>
-              <a:ext cx="1413666" cy="311965"/>
-            </a:xfrm>
-            <a:prstGeom prst="rect">
-              <a:avLst/>
-            </a:prstGeom>
-          </p:spPr>
-          <p:style>
-            <a:lnRef idx="2">
-              <a:schemeClr val="accent1">
-                <a:shade val="50000"/>
-              </a:schemeClr>
-            </a:lnRef>
-            <a:fillRef idx="1">
-              <a:schemeClr val="accent1"/>
-            </a:fillRef>
-            <a:effectRef idx="0">
-              <a:schemeClr val="accent1"/>
-            </a:effectRef>
-            <a:fontRef idx="minor">
-              <a:schemeClr val="lt1"/>
-            </a:fontRef>
-          </p:style>
-          <p:txBody>
-            <a:bodyPr rtlCol="0" anchor="ctr"/>
-            <a:lstStyle/>
-            <a:p>
-              <a:pPr algn="ctr"/>
-              <a:r>
-                <a:rPr lang="en-US" sz="1400" dirty="0"/>
-                <a:t>Specific assumptions</a:t>
-              </a:r>
-            </a:p>
-          </p:txBody>
-        </p:sp>
-        <p:cxnSp>
-          <p:nvCxnSpPr>
-            <p:cNvPr id="11" name="Straight Arrow Connector 10">
-              <a:extLst>
-                <a:ext uri="{FF2B5EF4-FFF2-40B4-BE49-F238E27FC236}">
-                  <a16:creationId xmlns:a16="http://schemas.microsoft.com/office/drawing/2014/main" id="{9DC4C3A1-8F31-9787-85AA-F51C2667292F}"/>
-                </a:ext>
-              </a:extLst>
-            </p:cNvPr>
-            <p:cNvCxnSpPr>
-              <a:stCxn id="10" idx="3"/>
-              <a:endCxn id="13" idx="1"/>
-            </p:cNvCxnSpPr>
-            <p:nvPr/>
-          </p:nvCxnSpPr>
-          <p:spPr>
-            <a:xfrm>
-              <a:off x="4149071" y="4685566"/>
-              <a:ext cx="632606" cy="106772"/>
-            </a:xfrm>
-            <a:prstGeom prst="straightConnector1">
-              <a:avLst/>
-            </a:prstGeom>
-            <a:ln>
-              <a:prstDash val="lgDash"/>
-              <a:tailEnd type="triangle"/>
-            </a:ln>
-          </p:spPr>
-          <p:style>
-            <a:lnRef idx="1">
-              <a:schemeClr val="accent6"/>
-            </a:lnRef>
-            <a:fillRef idx="0">
-              <a:schemeClr val="accent6"/>
-            </a:fillRef>
-            <a:effectRef idx="0">
-              <a:schemeClr val="accent6"/>
-            </a:effectRef>
-            <a:fontRef idx="minor">
-              <a:schemeClr val="tx1"/>
-            </a:fontRef>
-          </p:style>
-        </p:cxnSp>
-        <p:sp>
-          <p:nvSpPr>
-            <p:cNvPr id="12" name="Rectangle 11">
-              <a:extLst>
-                <a:ext uri="{FF2B5EF4-FFF2-40B4-BE49-F238E27FC236}">
-                  <a16:creationId xmlns:a16="http://schemas.microsoft.com/office/drawing/2014/main" id="{2DEC43A6-A03A-5F3E-9C61-0F0AE038BCAB}"/>
-                </a:ext>
-              </a:extLst>
-            </p:cNvPr>
-            <p:cNvSpPr/>
-            <p:nvPr/>
-          </p:nvSpPr>
-          <p:spPr>
-            <a:xfrm>
-              <a:off x="5047457" y="3768237"/>
-              <a:ext cx="2097086" cy="311965"/>
-            </a:xfrm>
-            <a:prstGeom prst="rect">
-              <a:avLst/>
-            </a:prstGeom>
-          </p:spPr>
-          <p:style>
-            <a:lnRef idx="2">
-              <a:schemeClr val="accent1">
-                <a:shade val="50000"/>
-              </a:schemeClr>
-            </a:lnRef>
-            <a:fillRef idx="1">
-              <a:schemeClr val="accent1"/>
-            </a:fillRef>
-            <a:effectRef idx="0">
-              <a:schemeClr val="accent1"/>
-            </a:effectRef>
-            <a:fontRef idx="minor">
-              <a:schemeClr val="lt1"/>
-            </a:fontRef>
-          </p:style>
-          <p:txBody>
-            <a:bodyPr rtlCol="0" anchor="ctr"/>
-            <a:lstStyle/>
-            <a:p>
-              <a:pPr algn="ctr"/>
-              <a:r>
-                <a:rPr lang="en-US" sz="1400" dirty="0"/>
-                <a:t>General mathematical framework</a:t>
-              </a:r>
-            </a:p>
-          </p:txBody>
-        </p:sp>
-        <p:sp>
-          <p:nvSpPr>
-            <p:cNvPr id="13" name="Rectangle 12">
-              <a:extLst>
-                <a:ext uri="{FF2B5EF4-FFF2-40B4-BE49-F238E27FC236}">
-                  <a16:creationId xmlns:a16="http://schemas.microsoft.com/office/drawing/2014/main" id="{A0CA2AB4-7757-12D9-AE01-257FE3CEDF7D}"/>
-                </a:ext>
-              </a:extLst>
-            </p:cNvPr>
-            <p:cNvSpPr/>
-            <p:nvPr/>
-          </p:nvSpPr>
-          <p:spPr>
-            <a:xfrm>
-              <a:off x="4781677" y="4557604"/>
-              <a:ext cx="912946" cy="469467"/>
-            </a:xfrm>
-            <a:prstGeom prst="rect">
-              <a:avLst/>
-            </a:prstGeom>
-          </p:spPr>
-          <p:style>
-            <a:lnRef idx="2">
-              <a:schemeClr val="accent1">
-                <a:shade val="50000"/>
-              </a:schemeClr>
-            </a:lnRef>
-            <a:fillRef idx="1">
-              <a:schemeClr val="accent1"/>
-            </a:fillRef>
-            <a:effectRef idx="0">
-              <a:schemeClr val="accent1"/>
-            </a:effectRef>
-            <a:fontRef idx="minor">
-              <a:schemeClr val="lt1"/>
-            </a:fontRef>
-          </p:style>
-          <p:txBody>
-            <a:bodyPr rtlCol="0" anchor="ctr"/>
-            <a:lstStyle/>
-            <a:p>
-              <a:pPr algn="ctr"/>
-              <a:r>
-                <a:rPr lang="en-US" sz="1400" dirty="0"/>
-                <a:t>Classical mechanics</a:t>
-              </a:r>
-            </a:p>
-          </p:txBody>
-        </p:sp>
-        <p:cxnSp>
-          <p:nvCxnSpPr>
-            <p:cNvPr id="14" name="Connector: Elbow 13">
-              <a:extLst>
-                <a:ext uri="{FF2B5EF4-FFF2-40B4-BE49-F238E27FC236}">
-                  <a16:creationId xmlns:a16="http://schemas.microsoft.com/office/drawing/2014/main" id="{902DA223-D7C3-935A-F1B7-F1DAA4693FEC}"/>
-                </a:ext>
-              </a:extLst>
-            </p:cNvPr>
-            <p:cNvCxnSpPr>
-              <a:cxnSpLocks/>
-              <a:stCxn id="23" idx="0"/>
-              <a:endCxn id="12" idx="2"/>
-            </p:cNvCxnSpPr>
-            <p:nvPr/>
-          </p:nvCxnSpPr>
-          <p:spPr>
-            <a:xfrm rot="5400000" flipH="1" flipV="1">
-              <a:off x="5061856" y="4383455"/>
-              <a:ext cx="1337396" cy="730891"/>
-            </a:xfrm>
-            <a:prstGeom prst="bentConnector3">
-              <a:avLst>
-                <a:gd name="adj1" fmla="val 15814"/>
-              </a:avLst>
-            </a:prstGeom>
-            <a:ln>
-              <a:headEnd type="triangle" w="med" len="med"/>
-              <a:tailEnd type="none" w="med" len="med"/>
-            </a:ln>
-          </p:spPr>
-          <p:style>
-            <a:lnRef idx="1">
-              <a:schemeClr val="accent1"/>
-            </a:lnRef>
-            <a:fillRef idx="0">
-              <a:schemeClr val="accent1"/>
-            </a:fillRef>
-            <a:effectRef idx="0">
-              <a:schemeClr val="accent1"/>
-            </a:effectRef>
-            <a:fontRef idx="minor">
-              <a:schemeClr val="tx1"/>
-            </a:fontRef>
-          </p:style>
-        </p:cxnSp>
-        <p:cxnSp>
-          <p:nvCxnSpPr>
-            <p:cNvPr id="15" name="Connector: Elbow 14">
-              <a:extLst>
-                <a:ext uri="{FF2B5EF4-FFF2-40B4-BE49-F238E27FC236}">
-                  <a16:creationId xmlns:a16="http://schemas.microsoft.com/office/drawing/2014/main" id="{426285A9-3965-FF59-11DC-11FA32F3430D}"/>
-                </a:ext>
-              </a:extLst>
-            </p:cNvPr>
-            <p:cNvCxnSpPr>
-              <a:cxnSpLocks/>
-              <a:stCxn id="22" idx="0"/>
-              <a:endCxn id="12" idx="2"/>
-            </p:cNvCxnSpPr>
-            <p:nvPr/>
-          </p:nvCxnSpPr>
-          <p:spPr>
-            <a:xfrm rot="16200000" flipV="1">
-              <a:off x="6276391" y="3899812"/>
-              <a:ext cx="463101" cy="823881"/>
-            </a:xfrm>
-            <a:prstGeom prst="bentConnector3">
-              <a:avLst>
-                <a:gd name="adj1" fmla="val 46709"/>
-              </a:avLst>
-            </a:prstGeom>
-            <a:ln>
-              <a:headEnd type="triangle" w="med" len="med"/>
-              <a:tailEnd type="none" w="med" len="med"/>
-            </a:ln>
-          </p:spPr>
-          <p:style>
-            <a:lnRef idx="1">
-              <a:schemeClr val="accent1"/>
-            </a:lnRef>
-            <a:fillRef idx="0">
-              <a:schemeClr val="accent1"/>
-            </a:fillRef>
-            <a:effectRef idx="0">
-              <a:schemeClr val="accent1"/>
-            </a:effectRef>
-            <a:fontRef idx="minor">
-              <a:schemeClr val="tx1"/>
-            </a:fontRef>
-          </p:style>
-        </p:cxnSp>
-        <p:cxnSp>
-          <p:nvCxnSpPr>
-            <p:cNvPr id="16" name="Connector: Elbow 15">
-              <a:extLst>
-                <a:ext uri="{FF2B5EF4-FFF2-40B4-BE49-F238E27FC236}">
-                  <a16:creationId xmlns:a16="http://schemas.microsoft.com/office/drawing/2014/main" id="{A70CEDB8-41AD-3076-4B6E-494486F61209}"/>
-                </a:ext>
-              </a:extLst>
-            </p:cNvPr>
-            <p:cNvCxnSpPr>
-              <a:cxnSpLocks/>
-              <a:stCxn id="24" idx="0"/>
-              <a:endCxn id="12" idx="2"/>
-            </p:cNvCxnSpPr>
-            <p:nvPr/>
-          </p:nvCxnSpPr>
-          <p:spPr>
-            <a:xfrm rot="16200000" flipV="1">
-              <a:off x="5776657" y="4399546"/>
-              <a:ext cx="1278117" cy="639430"/>
-            </a:xfrm>
-            <a:prstGeom prst="bentConnector3">
-              <a:avLst>
-                <a:gd name="adj1" fmla="val 11844"/>
-              </a:avLst>
-            </a:prstGeom>
-            <a:ln>
-              <a:headEnd type="triangle" w="med" len="med"/>
-              <a:tailEnd type="none" w="med" len="med"/>
-            </a:ln>
-          </p:spPr>
-          <p:style>
-            <a:lnRef idx="1">
-              <a:schemeClr val="accent1"/>
-            </a:lnRef>
-            <a:fillRef idx="0">
-              <a:schemeClr val="accent1"/>
-            </a:fillRef>
-            <a:effectRef idx="0">
-              <a:schemeClr val="accent1"/>
-            </a:effectRef>
-            <a:fontRef idx="minor">
-              <a:schemeClr val="tx1"/>
-            </a:fontRef>
-          </p:style>
-        </p:cxnSp>
-        <p:cxnSp>
-          <p:nvCxnSpPr>
-            <p:cNvPr id="17" name="Connector: Elbow 16">
-              <a:extLst>
-                <a:ext uri="{FF2B5EF4-FFF2-40B4-BE49-F238E27FC236}">
-                  <a16:creationId xmlns:a16="http://schemas.microsoft.com/office/drawing/2014/main" id="{1D021B5D-854F-5B3E-6282-129A3C138DF1}"/>
-                </a:ext>
-              </a:extLst>
-            </p:cNvPr>
-            <p:cNvCxnSpPr>
-              <a:cxnSpLocks/>
-              <a:stCxn id="13" idx="0"/>
-              <a:endCxn id="12" idx="2"/>
-            </p:cNvCxnSpPr>
-            <p:nvPr/>
-          </p:nvCxnSpPr>
-          <p:spPr>
-            <a:xfrm rot="5400000" flipH="1" flipV="1">
-              <a:off x="5428374" y="3889978"/>
-              <a:ext cx="477402" cy="857850"/>
-            </a:xfrm>
-            <a:prstGeom prst="bentConnector3">
-              <a:avLst/>
-            </a:prstGeom>
-            <a:ln>
-              <a:headEnd type="triangle" w="med" len="med"/>
-              <a:tailEnd type="none" w="med" len="med"/>
-            </a:ln>
-          </p:spPr>
-          <p:style>
-            <a:lnRef idx="1">
-              <a:schemeClr val="accent1"/>
-            </a:lnRef>
-            <a:fillRef idx="0">
-              <a:schemeClr val="accent1"/>
-            </a:fillRef>
-            <a:effectRef idx="0">
-              <a:schemeClr val="accent1"/>
-            </a:effectRef>
-            <a:fontRef idx="minor">
-              <a:schemeClr val="tx1"/>
-            </a:fontRef>
-          </p:style>
-        </p:cxnSp>
-        <p:sp>
-          <p:nvSpPr>
-            <p:cNvPr id="18" name="TextBox 17">
-              <a:extLst>
-                <a:ext uri="{FF2B5EF4-FFF2-40B4-BE49-F238E27FC236}">
-                  <a16:creationId xmlns:a16="http://schemas.microsoft.com/office/drawing/2014/main" id="{7D59DB8B-B858-033E-1B07-0B8B5228E773}"/>
-                </a:ext>
-              </a:extLst>
-            </p:cNvPr>
-            <p:cNvSpPr txBox="1"/>
-            <p:nvPr/>
-          </p:nvSpPr>
-          <p:spPr>
-            <a:xfrm>
-              <a:off x="2735405" y="5532591"/>
-              <a:ext cx="1025494" cy="266113"/>
-            </a:xfrm>
-            <a:prstGeom prst="rect">
-              <a:avLst/>
-            </a:prstGeom>
-            <a:noFill/>
-          </p:spPr>
-          <p:txBody>
-            <a:bodyPr wrap="none" rtlCol="0">
-              <a:spAutoFit/>
-            </a:bodyPr>
-            <a:lstStyle/>
-            <a:p>
-              <a:r>
-                <a:rPr lang="en-US" sz="1600" dirty="0"/>
-                <a:t>specialization</a:t>
-              </a:r>
-            </a:p>
-          </p:txBody>
-        </p:sp>
-        <p:cxnSp>
-          <p:nvCxnSpPr>
-            <p:cNvPr id="19" name="Straight Arrow Connector 18">
-              <a:extLst>
-                <a:ext uri="{FF2B5EF4-FFF2-40B4-BE49-F238E27FC236}">
-                  <a16:creationId xmlns:a16="http://schemas.microsoft.com/office/drawing/2014/main" id="{B1FDF61A-8F30-0017-30E4-7D1C53A8296D}"/>
-                </a:ext>
-              </a:extLst>
-            </p:cNvPr>
-            <p:cNvCxnSpPr>
-              <a:cxnSpLocks/>
-            </p:cNvCxnSpPr>
-            <p:nvPr/>
-          </p:nvCxnSpPr>
-          <p:spPr>
-            <a:xfrm flipV="1">
-              <a:off x="2642761" y="5526180"/>
-              <a:ext cx="0" cy="274432"/>
-            </a:xfrm>
-            <a:prstGeom prst="straightConnector1">
-              <a:avLst/>
-            </a:prstGeom>
-            <a:ln>
-              <a:headEnd type="triangle" w="med" len="med"/>
-              <a:tailEnd type="none" w="med" len="med"/>
-            </a:ln>
-          </p:spPr>
-          <p:style>
-            <a:lnRef idx="1">
-              <a:schemeClr val="accent1"/>
-            </a:lnRef>
-            <a:fillRef idx="0">
-              <a:schemeClr val="accent1"/>
-            </a:fillRef>
-            <a:effectRef idx="0">
-              <a:schemeClr val="accent1"/>
-            </a:effectRef>
-            <a:fontRef idx="minor">
-              <a:schemeClr val="tx1"/>
-            </a:fontRef>
-          </p:style>
-        </p:cxnSp>
-        <p:sp>
-          <p:nvSpPr>
-            <p:cNvPr id="20" name="TextBox 19">
-              <a:extLst>
-                <a:ext uri="{FF2B5EF4-FFF2-40B4-BE49-F238E27FC236}">
-                  <a16:creationId xmlns:a16="http://schemas.microsoft.com/office/drawing/2014/main" id="{E0DDB686-940E-4208-BD81-AFB129B6EF28}"/>
-                </a:ext>
-              </a:extLst>
-            </p:cNvPr>
-            <p:cNvSpPr txBox="1"/>
-            <p:nvPr/>
-          </p:nvSpPr>
-          <p:spPr>
-            <a:xfrm>
-              <a:off x="844062" y="3573208"/>
-              <a:ext cx="1764385" cy="2104712"/>
-            </a:xfrm>
-            <a:prstGeom prst="rect">
-              <a:avLst/>
-            </a:prstGeom>
-            <a:noFill/>
-          </p:spPr>
-          <p:txBody>
-            <a:bodyPr wrap="square" rtlCol="0">
-              <a:spAutoFit/>
-            </a:bodyPr>
-            <a:lstStyle/>
-            <a:p>
-              <a:r>
-                <a:rPr lang="en-US" sz="2400" dirty="0">
-                  <a:solidFill>
-                    <a:schemeClr val="accent6">
-                      <a:lumMod val="75000"/>
-                    </a:schemeClr>
-                  </a:solidFill>
-                </a:rPr>
-                <a:t>Find a minimal set of physical assumptions from which to rigorously rederive the laws</a:t>
-              </a:r>
-            </a:p>
-          </p:txBody>
-        </p:sp>
-        <p:sp>
-          <p:nvSpPr>
-            <p:cNvPr id="21" name="Rectangle 20">
-              <a:extLst>
-                <a:ext uri="{FF2B5EF4-FFF2-40B4-BE49-F238E27FC236}">
-                  <a16:creationId xmlns:a16="http://schemas.microsoft.com/office/drawing/2014/main" id="{30550A18-2690-E582-1043-8874686C6B83}"/>
-                </a:ext>
-              </a:extLst>
-            </p:cNvPr>
-            <p:cNvSpPr/>
-            <p:nvPr/>
-          </p:nvSpPr>
-          <p:spPr>
-            <a:xfrm>
-              <a:off x="795348" y="3429000"/>
-              <a:ext cx="6782375" cy="2772696"/>
-            </a:xfrm>
-            <a:prstGeom prst="rect">
-              <a:avLst/>
-            </a:prstGeom>
-            <a:noFill/>
-            <a:ln w="28575">
-              <a:solidFill>
-                <a:schemeClr val="tx1"/>
-              </a:solidFill>
-              <a:prstDash val="dash"/>
-            </a:ln>
-          </p:spPr>
-          <p:style>
-            <a:lnRef idx="2">
-              <a:schemeClr val="accent1">
-                <a:shade val="50000"/>
-              </a:schemeClr>
-            </a:lnRef>
-            <a:fillRef idx="1">
-              <a:schemeClr val="accent1"/>
-            </a:fillRef>
-            <a:effectRef idx="0">
-              <a:schemeClr val="accent1"/>
-            </a:effectRef>
-            <a:fontRef idx="minor">
-              <a:schemeClr val="lt1"/>
-            </a:fontRef>
-          </p:style>
-          <p:txBody>
-            <a:bodyPr rtlCol="0" anchor="ctr"/>
-            <a:lstStyle/>
-            <a:p>
-              <a:pPr algn="ctr"/>
-              <a:endParaRPr lang="en-US"/>
-            </a:p>
-          </p:txBody>
-        </p:sp>
-        <p:sp>
-          <p:nvSpPr>
-            <p:cNvPr id="22" name="Rectangle 21">
-              <a:extLst>
-                <a:ext uri="{FF2B5EF4-FFF2-40B4-BE49-F238E27FC236}">
-                  <a16:creationId xmlns:a16="http://schemas.microsoft.com/office/drawing/2014/main" id="{6552F857-1A75-5438-3E9F-2AB44C0FB484}"/>
-                </a:ext>
-              </a:extLst>
-            </p:cNvPr>
-            <p:cNvSpPr/>
-            <p:nvPr/>
-          </p:nvSpPr>
-          <p:spPr>
-            <a:xfrm>
-              <a:off x="6463408" y="4543303"/>
-              <a:ext cx="912946" cy="469467"/>
-            </a:xfrm>
-            <a:prstGeom prst="rect">
-              <a:avLst/>
-            </a:prstGeom>
-          </p:spPr>
-          <p:style>
-            <a:lnRef idx="2">
-              <a:schemeClr val="accent1">
-                <a:shade val="50000"/>
-              </a:schemeClr>
-            </a:lnRef>
-            <a:fillRef idx="1">
-              <a:schemeClr val="accent1"/>
-            </a:fillRef>
-            <a:effectRef idx="0">
-              <a:schemeClr val="accent1"/>
-            </a:effectRef>
-            <a:fontRef idx="minor">
-              <a:schemeClr val="lt1"/>
-            </a:fontRef>
-          </p:style>
-          <p:txBody>
-            <a:bodyPr rtlCol="0" anchor="ctr"/>
-            <a:lstStyle/>
-            <a:p>
-              <a:pPr algn="ctr"/>
-              <a:r>
-                <a:rPr lang="en-US" sz="1400" dirty="0"/>
-                <a:t>Quantum mechanics</a:t>
-              </a:r>
-            </a:p>
-          </p:txBody>
-        </p:sp>
-        <p:sp>
-          <p:nvSpPr>
-            <p:cNvPr id="23" name="Rectangle 22">
-              <a:extLst>
-                <a:ext uri="{FF2B5EF4-FFF2-40B4-BE49-F238E27FC236}">
-                  <a16:creationId xmlns:a16="http://schemas.microsoft.com/office/drawing/2014/main" id="{1481E2C7-87EC-26CC-BB4A-56F8C9ECA91F}"/>
-                </a:ext>
-              </a:extLst>
-            </p:cNvPr>
-            <p:cNvSpPr/>
-            <p:nvPr/>
-          </p:nvSpPr>
-          <p:spPr>
-            <a:xfrm>
-              <a:off x="4756864" y="5417598"/>
-              <a:ext cx="1216490" cy="311965"/>
-            </a:xfrm>
-            <a:prstGeom prst="rect">
-              <a:avLst/>
-            </a:prstGeom>
-          </p:spPr>
-          <p:style>
-            <a:lnRef idx="2">
-              <a:schemeClr val="accent1">
-                <a:shade val="50000"/>
-              </a:schemeClr>
-            </a:lnRef>
-            <a:fillRef idx="1">
-              <a:schemeClr val="accent1"/>
-            </a:fillRef>
-            <a:effectRef idx="0">
-              <a:schemeClr val="accent1"/>
-            </a:effectRef>
-            <a:fontRef idx="minor">
-              <a:schemeClr val="lt1"/>
-            </a:fontRef>
-          </p:style>
-          <p:txBody>
-            <a:bodyPr rtlCol="0" anchor="ctr"/>
-            <a:lstStyle/>
-            <a:p>
-              <a:pPr algn="ctr"/>
-              <a:r>
-                <a:rPr lang="en-US" sz="1400" dirty="0"/>
-                <a:t>Thermodynamics</a:t>
-              </a:r>
-            </a:p>
-          </p:txBody>
-        </p:sp>
-        <p:sp>
-          <p:nvSpPr>
-            <p:cNvPr id="24" name="Rectangle 23">
-              <a:extLst>
-                <a:ext uri="{FF2B5EF4-FFF2-40B4-BE49-F238E27FC236}">
-                  <a16:creationId xmlns:a16="http://schemas.microsoft.com/office/drawing/2014/main" id="{067417DB-2D3A-265D-D859-7D99607CD46E}"/>
-                </a:ext>
-              </a:extLst>
-            </p:cNvPr>
-            <p:cNvSpPr/>
-            <p:nvPr/>
-          </p:nvSpPr>
-          <p:spPr>
-            <a:xfrm>
-              <a:off x="6529232" y="5358319"/>
-              <a:ext cx="412395" cy="311965"/>
-            </a:xfrm>
-            <a:prstGeom prst="rect">
-              <a:avLst/>
-            </a:prstGeom>
-          </p:spPr>
-          <p:style>
-            <a:lnRef idx="2">
-              <a:schemeClr val="accent1">
-                <a:shade val="50000"/>
-              </a:schemeClr>
-            </a:lnRef>
-            <a:fillRef idx="1">
-              <a:schemeClr val="accent1"/>
-            </a:fillRef>
-            <a:effectRef idx="0">
-              <a:schemeClr val="accent1"/>
-            </a:effectRef>
-            <a:fontRef idx="minor">
-              <a:schemeClr val="lt1"/>
-            </a:fontRef>
-          </p:style>
-          <p:txBody>
-            <a:bodyPr rtlCol="0" anchor="ctr"/>
-            <a:lstStyle/>
-            <a:p>
-              <a:pPr algn="ctr"/>
-              <a:r>
-                <a:rPr lang="en-US" sz="1400" dirty="0"/>
-                <a:t>…</a:t>
-              </a:r>
-            </a:p>
-          </p:txBody>
-        </p:sp>
-        <p:sp>
-          <p:nvSpPr>
-            <p:cNvPr id="25" name="TextBox 24">
-              <a:extLst>
-                <a:ext uri="{FF2B5EF4-FFF2-40B4-BE49-F238E27FC236}">
-                  <a16:creationId xmlns:a16="http://schemas.microsoft.com/office/drawing/2014/main" id="{0409E235-B7D7-D38D-3F2B-263B727CA025}"/>
-                </a:ext>
-              </a:extLst>
-            </p:cNvPr>
-            <p:cNvSpPr txBox="1"/>
-            <p:nvPr/>
-          </p:nvSpPr>
-          <p:spPr>
-            <a:xfrm>
-              <a:off x="2754339" y="5140856"/>
-              <a:ext cx="810334" cy="266113"/>
-            </a:xfrm>
-            <a:prstGeom prst="rect">
-              <a:avLst/>
-            </a:prstGeom>
-            <a:noFill/>
-          </p:spPr>
-          <p:txBody>
-            <a:bodyPr wrap="none" rtlCol="0">
-              <a:spAutoFit/>
-            </a:bodyPr>
-            <a:lstStyle/>
-            <a:p>
-              <a:r>
-                <a:rPr lang="en-US" sz="1600" dirty="0"/>
-                <a:t>derivation</a:t>
-              </a:r>
-            </a:p>
-          </p:txBody>
-        </p:sp>
-        <p:cxnSp>
-          <p:nvCxnSpPr>
-            <p:cNvPr id="26" name="Straight Arrow Connector 25">
-              <a:extLst>
-                <a:ext uri="{FF2B5EF4-FFF2-40B4-BE49-F238E27FC236}">
-                  <a16:creationId xmlns:a16="http://schemas.microsoft.com/office/drawing/2014/main" id="{ABDE4221-E518-B5B5-4476-F3BBC6A8D630}"/>
-                </a:ext>
-              </a:extLst>
-            </p:cNvPr>
-            <p:cNvCxnSpPr>
-              <a:cxnSpLocks/>
-              <a:endCxn id="25" idx="1"/>
-            </p:cNvCxnSpPr>
-            <p:nvPr/>
-          </p:nvCxnSpPr>
-          <p:spPr>
-            <a:xfrm>
-              <a:off x="2508772" y="5271660"/>
-              <a:ext cx="245568" cy="2253"/>
-            </a:xfrm>
-            <a:prstGeom prst="straightConnector1">
-              <a:avLst/>
-            </a:prstGeom>
-            <a:ln>
-              <a:prstDash val="lgDash"/>
-              <a:tailEnd type="triangle"/>
-            </a:ln>
-          </p:spPr>
-          <p:style>
-            <a:lnRef idx="1">
-              <a:schemeClr val="accent6"/>
-            </a:lnRef>
-            <a:fillRef idx="0">
-              <a:schemeClr val="accent6"/>
-            </a:fillRef>
-            <a:effectRef idx="0">
-              <a:schemeClr val="accent6"/>
-            </a:effectRef>
-            <a:fontRef idx="minor">
-              <a:schemeClr val="tx1"/>
-            </a:fontRef>
-          </p:style>
-        </p:cxnSp>
-      </p:grpSp>
+              <a:t>and</a:t>
+            </a:r>
+          </a:p>
+        </p:txBody>
+      </p:sp>
     </p:spTree>
     <p:extLst>
       <p:ext uri="{BB962C8B-B14F-4D97-AF65-F5344CB8AC3E}">

--- a/2026/2026ThumbnailWhite.pptx
+++ b/2026/2026ThumbnailWhite.pptx
@@ -6,6 +6,9 @@
   </p:sldMasterIdLst>
   <p:sldIdLst>
     <p:sldId id="267" r:id="rId2"/>
+    <p:sldId id="268" r:id="rId3"/>
+    <p:sldId id="269" r:id="rId4"/>
+    <p:sldId id="270" r:id="rId5"/>
   </p:sldIdLst>
   <p:sldSz cx="12192000" cy="6858000"/>
   <p:notesSz cx="6858000" cy="9144000"/>
@@ -259,7 +262,7 @@
           <a:p>
             <a:fld id="{3816CC03-B68F-4642-A2B8-7A8633A67F21}" type="datetimeFigureOut">
               <a:rPr lang="en-US" smtClean="0"/>
-              <a:t>12/23/2025</a:t>
+              <a:t>4/27/2026</a:t>
             </a:fld>
             <a:endParaRPr lang="en-US"/>
           </a:p>
@@ -457,7 +460,7 @@
           <a:p>
             <a:fld id="{3816CC03-B68F-4642-A2B8-7A8633A67F21}" type="datetimeFigureOut">
               <a:rPr lang="en-US" smtClean="0"/>
-              <a:t>12/23/2025</a:t>
+              <a:t>4/27/2026</a:t>
             </a:fld>
             <a:endParaRPr lang="en-US"/>
           </a:p>
@@ -665,7 +668,7 @@
           <a:p>
             <a:fld id="{3816CC03-B68F-4642-A2B8-7A8633A67F21}" type="datetimeFigureOut">
               <a:rPr lang="en-US" smtClean="0"/>
-              <a:t>12/23/2025</a:t>
+              <a:t>4/27/2026</a:t>
             </a:fld>
             <a:endParaRPr lang="en-US"/>
           </a:p>
@@ -863,7 +866,7 @@
           <a:p>
             <a:fld id="{3816CC03-B68F-4642-A2B8-7A8633A67F21}" type="datetimeFigureOut">
               <a:rPr lang="en-US" smtClean="0"/>
-              <a:t>12/23/2025</a:t>
+              <a:t>4/27/2026</a:t>
             </a:fld>
             <a:endParaRPr lang="en-US"/>
           </a:p>
@@ -1138,7 +1141,7 @@
           <a:p>
             <a:fld id="{3816CC03-B68F-4642-A2B8-7A8633A67F21}" type="datetimeFigureOut">
               <a:rPr lang="en-US" smtClean="0"/>
-              <a:t>12/23/2025</a:t>
+              <a:t>4/27/2026</a:t>
             </a:fld>
             <a:endParaRPr lang="en-US"/>
           </a:p>
@@ -1403,7 +1406,7 @@
           <a:p>
             <a:fld id="{3816CC03-B68F-4642-A2B8-7A8633A67F21}" type="datetimeFigureOut">
               <a:rPr lang="en-US" smtClean="0"/>
-              <a:t>12/23/2025</a:t>
+              <a:t>4/27/2026</a:t>
             </a:fld>
             <a:endParaRPr lang="en-US"/>
           </a:p>
@@ -1815,7 +1818,7 @@
           <a:p>
             <a:fld id="{3816CC03-B68F-4642-A2B8-7A8633A67F21}" type="datetimeFigureOut">
               <a:rPr lang="en-US" smtClean="0"/>
-              <a:t>12/23/2025</a:t>
+              <a:t>4/27/2026</a:t>
             </a:fld>
             <a:endParaRPr lang="en-US"/>
           </a:p>
@@ -1956,7 +1959,7 @@
           <a:p>
             <a:fld id="{3816CC03-B68F-4642-A2B8-7A8633A67F21}" type="datetimeFigureOut">
               <a:rPr lang="en-US" smtClean="0"/>
-              <a:t>12/23/2025</a:t>
+              <a:t>4/27/2026</a:t>
             </a:fld>
             <a:endParaRPr lang="en-US"/>
           </a:p>
@@ -2141,7 +2144,7 @@
           <a:p>
             <a:fld id="{3816CC03-B68F-4642-A2B8-7A8633A67F21}" type="datetimeFigureOut">
               <a:rPr lang="en-US" smtClean="0"/>
-              <a:t>12/23/2025</a:t>
+              <a:t>4/27/2026</a:t>
             </a:fld>
             <a:endParaRPr lang="en-US"/>
           </a:p>
@@ -2452,7 +2455,7 @@
           <a:p>
             <a:fld id="{3816CC03-B68F-4642-A2B8-7A8633A67F21}" type="datetimeFigureOut">
               <a:rPr lang="en-US" smtClean="0"/>
-              <a:t>12/23/2025</a:t>
+              <a:t>4/27/2026</a:t>
             </a:fld>
             <a:endParaRPr lang="en-US"/>
           </a:p>
@@ -2740,7 +2743,7 @@
           <a:p>
             <a:fld id="{3816CC03-B68F-4642-A2B8-7A8633A67F21}" type="datetimeFigureOut">
               <a:rPr lang="en-US" smtClean="0"/>
-              <a:t>12/23/2025</a:t>
+              <a:t>4/27/2026</a:t>
             </a:fld>
             <a:endParaRPr lang="en-US"/>
           </a:p>
@@ -2981,7 +2984,7 @@
           <a:p>
             <a:fld id="{3816CC03-B68F-4642-A2B8-7A8633A67F21}" type="datetimeFigureOut">
               <a:rPr lang="en-US" smtClean="0"/>
-              <a:t>12/23/2025</a:t>
+              <a:t>4/27/2026</a:t>
             </a:fld>
             <a:endParaRPr lang="en-US"/>
           </a:p>
@@ -3536,6 +3539,1801 @@
 </p:sld>
 </file>
 
+<file path=ppt/slides/slide2.xml><?xml version="1.0" encoding="utf-8"?>
+<p:sld xmlns:a="http://schemas.openxmlformats.org/drawingml/2006/main" xmlns:r="http://schemas.openxmlformats.org/officeDocument/2006/relationships" xmlns:p="http://schemas.openxmlformats.org/presentationml/2006/main">
+  <p:cSld>
+    <p:spTree>
+      <p:nvGrpSpPr>
+        <p:cNvPr id="1" name=""/>
+        <p:cNvGrpSpPr/>
+        <p:nvPr/>
+      </p:nvGrpSpPr>
+      <p:grpSpPr>
+        <a:xfrm>
+          <a:off x="0" y="0"/>
+          <a:ext cx="0" cy="0"/>
+          <a:chOff x="0" y="0"/>
+          <a:chExt cx="0" cy="0"/>
+        </a:xfrm>
+      </p:grpSpPr>
+      <p:sp>
+        <p:nvSpPr>
+          <p:cNvPr id="2" name="TextBox 1">
+            <a:extLst>
+              <a:ext uri="{FF2B5EF4-FFF2-40B4-BE49-F238E27FC236}">
+                <a16:creationId xmlns:a16="http://schemas.microsoft.com/office/drawing/2014/main" id="{8EC1C636-C085-F489-AE83-051EBEC56D86}"/>
+              </a:ext>
+            </a:extLst>
+          </p:cNvPr>
+          <p:cNvSpPr txBox="1"/>
+          <p:nvPr/>
+        </p:nvSpPr>
+        <p:spPr>
+          <a:xfrm>
+            <a:off x="434796" y="489545"/>
+            <a:ext cx="9698488" cy="1569660"/>
+          </a:xfrm>
+          <a:prstGeom prst="rect">
+            <a:avLst/>
+          </a:prstGeom>
+          <a:noFill/>
+        </p:spPr>
+        <p:txBody>
+          <a:bodyPr wrap="none" rtlCol="0">
+            <a:spAutoFit/>
+          </a:bodyPr>
+          <a:lstStyle/>
+          <a:p>
+            <a:pPr algn="ctr"/>
+            <a:r>
+              <a:rPr lang="en-US" sz="9600" dirty="0">
+                <a:latin typeface="Alice" panose="00000500000000000000" pitchFamily="2" charset="0"/>
+              </a:rPr>
+              <a:t>What is classical?</a:t>
+            </a:r>
+          </a:p>
+        </p:txBody>
+      </p:sp>
+      <p:pic>
+        <p:nvPicPr>
+          <p:cNvPr id="4" name="Picture 3">
+            <a:extLst>
+              <a:ext uri="{FF2B5EF4-FFF2-40B4-BE49-F238E27FC236}">
+                <a16:creationId xmlns:a16="http://schemas.microsoft.com/office/drawing/2014/main" id="{D938E570-5945-DFA8-B5F1-A43A6839393D}"/>
+              </a:ext>
+            </a:extLst>
+          </p:cNvPr>
+          <p:cNvPicPr>
+            <a:picLocks noChangeAspect="1"/>
+          </p:cNvPicPr>
+          <p:nvPr/>
+        </p:nvPicPr>
+        <p:blipFill>
+          <a:blip r:embed="rId2">
+            <a:extLst>
+              <a:ext uri="{28A0092B-C50C-407E-A947-70E740481C1C}">
+                <a14:useLocalDpi xmlns:a14="http://schemas.microsoft.com/office/drawing/2010/main" val="0"/>
+              </a:ext>
+            </a:extLst>
+          </a:blip>
+          <a:stretch>
+            <a:fillRect/>
+          </a:stretch>
+        </p:blipFill>
+        <p:spPr>
+          <a:xfrm>
+            <a:off x="10532823" y="5084976"/>
+            <a:ext cx="1208202" cy="1208202"/>
+          </a:xfrm>
+          <a:prstGeom prst="ellipse">
+            <a:avLst/>
+          </a:prstGeom>
+        </p:spPr>
+      </p:pic>
+      <p:sp>
+        <p:nvSpPr>
+          <p:cNvPr id="5" name="TextBox 4">
+            <a:extLst>
+              <a:ext uri="{FF2B5EF4-FFF2-40B4-BE49-F238E27FC236}">
+                <a16:creationId xmlns:a16="http://schemas.microsoft.com/office/drawing/2014/main" id="{5E7C064D-89CC-378E-B4AA-CB94B4AC1041}"/>
+              </a:ext>
+            </a:extLst>
+          </p:cNvPr>
+          <p:cNvSpPr txBox="1"/>
+          <p:nvPr/>
+        </p:nvSpPr>
+        <p:spPr>
+          <a:xfrm>
+            <a:off x="10133284" y="6369476"/>
+            <a:ext cx="2007281" cy="253916"/>
+          </a:xfrm>
+          <a:prstGeom prst="rect">
+            <a:avLst/>
+          </a:prstGeom>
+          <a:noFill/>
+        </p:spPr>
+        <p:txBody>
+          <a:bodyPr wrap="none" rtlCol="0">
+            <a:spAutoFit/>
+          </a:bodyPr>
+          <a:lstStyle/>
+          <a:p>
+            <a:r>
+              <a:rPr lang="en-US" sz="1050" b="1" i="1" dirty="0">
+                <a:latin typeface="Arial" panose="020B0604020202020204" pitchFamily="34" charset="0"/>
+                <a:cs typeface="Arial" panose="020B0604020202020204" pitchFamily="34" charset="0"/>
+              </a:rPr>
+              <a:t>THEORIES OF EVERYTHING</a:t>
+            </a:r>
+          </a:p>
+        </p:txBody>
+      </p:sp>
+      <p:sp>
+        <p:nvSpPr>
+          <p:cNvPr id="6" name="TextBox 5">
+            <a:extLst>
+              <a:ext uri="{FF2B5EF4-FFF2-40B4-BE49-F238E27FC236}">
+                <a16:creationId xmlns:a16="http://schemas.microsoft.com/office/drawing/2014/main" id="{62732C8E-E6A8-0386-52CA-B24FCAC1233E}"/>
+              </a:ext>
+            </a:extLst>
+          </p:cNvPr>
+          <p:cNvSpPr txBox="1"/>
+          <p:nvPr/>
+        </p:nvSpPr>
+        <p:spPr>
+          <a:xfrm>
+            <a:off x="10396978" y="4639346"/>
+            <a:ext cx="1479892" cy="369332"/>
+          </a:xfrm>
+          <a:prstGeom prst="rect">
+            <a:avLst/>
+          </a:prstGeom>
+          <a:noFill/>
+        </p:spPr>
+        <p:txBody>
+          <a:bodyPr wrap="none" rtlCol="0">
+            <a:spAutoFit/>
+          </a:bodyPr>
+          <a:lstStyle/>
+          <a:p>
+            <a:r>
+              <a:rPr lang="en-US" i="1" dirty="0">
+                <a:latin typeface="Arial" panose="020B0604020202020204" pitchFamily="34" charset="0"/>
+                <a:cs typeface="Arial" panose="020B0604020202020204" pitchFamily="34" charset="0"/>
+              </a:rPr>
+              <a:t>for </a:t>
+            </a:r>
+            <a:r>
+              <a:rPr lang="en-US" b="1" i="1" dirty="0">
+                <a:latin typeface="Arial" panose="020B0604020202020204" pitchFamily="34" charset="0"/>
+                <a:cs typeface="Arial" panose="020B0604020202020204" pitchFamily="34" charset="0"/>
+              </a:rPr>
+              <a:t>#CORE1</a:t>
+            </a:r>
+          </a:p>
+        </p:txBody>
+      </p:sp>
+      <p:sp>
+        <p:nvSpPr>
+          <p:cNvPr id="7" name="TextBox 6">
+            <a:extLst>
+              <a:ext uri="{FF2B5EF4-FFF2-40B4-BE49-F238E27FC236}">
+                <a16:creationId xmlns:a16="http://schemas.microsoft.com/office/drawing/2014/main" id="{6D94F1D8-13CF-B813-009D-9DDC334A704F}"/>
+              </a:ext>
+            </a:extLst>
+          </p:cNvPr>
+          <p:cNvSpPr txBox="1"/>
+          <p:nvPr/>
+        </p:nvSpPr>
+        <p:spPr>
+          <a:xfrm>
+            <a:off x="1925909" y="2389287"/>
+            <a:ext cx="10214656" cy="1569660"/>
+          </a:xfrm>
+          <a:prstGeom prst="rect">
+            <a:avLst/>
+          </a:prstGeom>
+          <a:noFill/>
+        </p:spPr>
+        <p:txBody>
+          <a:bodyPr wrap="none" rtlCol="0">
+            <a:spAutoFit/>
+          </a:bodyPr>
+          <a:lstStyle/>
+          <a:p>
+            <a:pPr algn="ctr"/>
+            <a:r>
+              <a:rPr lang="en-US" sz="9600" dirty="0">
+                <a:latin typeface="Alice" panose="00000500000000000000" pitchFamily="2" charset="0"/>
+              </a:rPr>
+              <a:t>What is quantum?</a:t>
+            </a:r>
+          </a:p>
+        </p:txBody>
+      </p:sp>
+      <p:pic>
+        <p:nvPicPr>
+          <p:cNvPr id="11" name="Picture 10">
+            <a:extLst>
+              <a:ext uri="{FF2B5EF4-FFF2-40B4-BE49-F238E27FC236}">
+                <a16:creationId xmlns:a16="http://schemas.microsoft.com/office/drawing/2014/main" id="{CA50371C-29DA-A4CE-908B-F949A2634458}"/>
+              </a:ext>
+            </a:extLst>
+          </p:cNvPr>
+          <p:cNvPicPr>
+            <a:picLocks noChangeAspect="1"/>
+          </p:cNvPicPr>
+          <p:nvPr/>
+        </p:nvPicPr>
+        <p:blipFill>
+          <a:blip r:embed="rId3"/>
+          <a:srcRect b="33705"/>
+          <a:stretch>
+            <a:fillRect/>
+          </a:stretch>
+        </p:blipFill>
+        <p:spPr>
+          <a:xfrm>
+            <a:off x="2991594" y="4824012"/>
+            <a:ext cx="6378493" cy="1364059"/>
+          </a:xfrm>
+          <a:prstGeom prst="rect">
+            <a:avLst/>
+          </a:prstGeom>
+        </p:spPr>
+      </p:pic>
+    </p:spTree>
+    <p:extLst>
+      <p:ext uri="{BB962C8B-B14F-4D97-AF65-F5344CB8AC3E}">
+        <p14:creationId xmlns:p14="http://schemas.microsoft.com/office/powerpoint/2010/main" val="19714667"/>
+      </p:ext>
+    </p:extLst>
+  </p:cSld>
+  <p:clrMapOvr>
+    <a:masterClrMapping/>
+  </p:clrMapOvr>
+</p:sld>
+</file>
+
+<file path=ppt/slides/slide3.xml><?xml version="1.0" encoding="utf-8"?>
+<p:sld xmlns:a="http://schemas.openxmlformats.org/drawingml/2006/main" xmlns:r="http://schemas.openxmlformats.org/officeDocument/2006/relationships" xmlns:p="http://schemas.openxmlformats.org/presentationml/2006/main">
+  <p:cSld>
+    <p:spTree>
+      <p:nvGrpSpPr>
+        <p:cNvPr id="1" name="">
+          <a:extLst>
+            <a:ext uri="{FF2B5EF4-FFF2-40B4-BE49-F238E27FC236}">
+              <a16:creationId xmlns:a16="http://schemas.microsoft.com/office/drawing/2014/main" id="{436DF3D2-A733-B35B-4D09-D53C9D3EB8F5}"/>
+            </a:ext>
+          </a:extLst>
+        </p:cNvPr>
+        <p:cNvGrpSpPr/>
+        <p:nvPr/>
+      </p:nvGrpSpPr>
+      <p:grpSpPr>
+        <a:xfrm>
+          <a:off x="0" y="0"/>
+          <a:ext cx="0" cy="0"/>
+          <a:chOff x="0" y="0"/>
+          <a:chExt cx="0" cy="0"/>
+        </a:xfrm>
+      </p:grpSpPr>
+      <p:sp>
+        <p:nvSpPr>
+          <p:cNvPr id="2" name="TextBox 1">
+            <a:extLst>
+              <a:ext uri="{FF2B5EF4-FFF2-40B4-BE49-F238E27FC236}">
+                <a16:creationId xmlns:a16="http://schemas.microsoft.com/office/drawing/2014/main" id="{5885E232-2C8D-124A-49FD-8ABCEF366ACA}"/>
+              </a:ext>
+            </a:extLst>
+          </p:cNvPr>
+          <p:cNvSpPr txBox="1"/>
+          <p:nvPr/>
+        </p:nvSpPr>
+        <p:spPr>
+          <a:xfrm>
+            <a:off x="386863" y="324171"/>
+            <a:ext cx="5892960" cy="1862048"/>
+          </a:xfrm>
+          <a:prstGeom prst="rect">
+            <a:avLst/>
+          </a:prstGeom>
+          <a:noFill/>
+        </p:spPr>
+        <p:txBody>
+          <a:bodyPr wrap="none" rtlCol="0">
+            <a:spAutoFit/>
+          </a:bodyPr>
+          <a:lstStyle/>
+          <a:p>
+            <a:pPr algn="ctr"/>
+            <a:r>
+              <a:rPr lang="en-US" sz="11500" dirty="0">
+                <a:latin typeface="Alice" panose="00000500000000000000" pitchFamily="2" charset="0"/>
+              </a:rPr>
+              <a:t>Classical</a:t>
+            </a:r>
+          </a:p>
+        </p:txBody>
+      </p:sp>
+      <p:pic>
+        <p:nvPicPr>
+          <p:cNvPr id="4" name="Picture 3">
+            <a:extLst>
+              <a:ext uri="{FF2B5EF4-FFF2-40B4-BE49-F238E27FC236}">
+                <a16:creationId xmlns:a16="http://schemas.microsoft.com/office/drawing/2014/main" id="{06777BB2-3DCE-01E6-7114-9A634DE62D1C}"/>
+              </a:ext>
+            </a:extLst>
+          </p:cNvPr>
+          <p:cNvPicPr>
+            <a:picLocks noChangeAspect="1"/>
+          </p:cNvPicPr>
+          <p:nvPr/>
+        </p:nvPicPr>
+        <p:blipFill>
+          <a:blip r:embed="rId2">
+            <a:extLst>
+              <a:ext uri="{28A0092B-C50C-407E-A947-70E740481C1C}">
+                <a14:useLocalDpi xmlns:a14="http://schemas.microsoft.com/office/drawing/2010/main" val="0"/>
+              </a:ext>
+            </a:extLst>
+          </a:blip>
+          <a:stretch>
+            <a:fillRect/>
+          </a:stretch>
+        </p:blipFill>
+        <p:spPr>
+          <a:xfrm>
+            <a:off x="10532823" y="5084976"/>
+            <a:ext cx="1208202" cy="1208202"/>
+          </a:xfrm>
+          <a:prstGeom prst="ellipse">
+            <a:avLst/>
+          </a:prstGeom>
+        </p:spPr>
+      </p:pic>
+      <p:sp>
+        <p:nvSpPr>
+          <p:cNvPr id="5" name="TextBox 4">
+            <a:extLst>
+              <a:ext uri="{FF2B5EF4-FFF2-40B4-BE49-F238E27FC236}">
+                <a16:creationId xmlns:a16="http://schemas.microsoft.com/office/drawing/2014/main" id="{78E111F9-6A4E-C78E-2780-17265DAD64C0}"/>
+              </a:ext>
+            </a:extLst>
+          </p:cNvPr>
+          <p:cNvSpPr txBox="1"/>
+          <p:nvPr/>
+        </p:nvSpPr>
+        <p:spPr>
+          <a:xfrm>
+            <a:off x="10133284" y="6369476"/>
+            <a:ext cx="2007281" cy="253916"/>
+          </a:xfrm>
+          <a:prstGeom prst="rect">
+            <a:avLst/>
+          </a:prstGeom>
+          <a:noFill/>
+        </p:spPr>
+        <p:txBody>
+          <a:bodyPr wrap="none" rtlCol="0">
+            <a:spAutoFit/>
+          </a:bodyPr>
+          <a:lstStyle/>
+          <a:p>
+            <a:r>
+              <a:rPr lang="en-US" sz="1050" b="1" i="1" dirty="0">
+                <a:latin typeface="Arial" panose="020B0604020202020204" pitchFamily="34" charset="0"/>
+                <a:cs typeface="Arial" panose="020B0604020202020204" pitchFamily="34" charset="0"/>
+              </a:rPr>
+              <a:t>THEORIES OF EVERYTHING</a:t>
+            </a:r>
+          </a:p>
+        </p:txBody>
+      </p:sp>
+      <p:sp>
+        <p:nvSpPr>
+          <p:cNvPr id="6" name="TextBox 5">
+            <a:extLst>
+              <a:ext uri="{FF2B5EF4-FFF2-40B4-BE49-F238E27FC236}">
+                <a16:creationId xmlns:a16="http://schemas.microsoft.com/office/drawing/2014/main" id="{8F70FE9E-B5C6-F1DF-DCCB-7B59B0B7CFF0}"/>
+              </a:ext>
+            </a:extLst>
+          </p:cNvPr>
+          <p:cNvSpPr txBox="1"/>
+          <p:nvPr/>
+        </p:nvSpPr>
+        <p:spPr>
+          <a:xfrm>
+            <a:off x="10396978" y="4639346"/>
+            <a:ext cx="1479892" cy="369332"/>
+          </a:xfrm>
+          <a:prstGeom prst="rect">
+            <a:avLst/>
+          </a:prstGeom>
+          <a:noFill/>
+        </p:spPr>
+        <p:txBody>
+          <a:bodyPr wrap="none" rtlCol="0">
+            <a:spAutoFit/>
+          </a:bodyPr>
+          <a:lstStyle/>
+          <a:p>
+            <a:r>
+              <a:rPr lang="en-US" i="1" dirty="0">
+                <a:latin typeface="Arial" panose="020B0604020202020204" pitchFamily="34" charset="0"/>
+                <a:cs typeface="Arial" panose="020B0604020202020204" pitchFamily="34" charset="0"/>
+              </a:rPr>
+              <a:t>for </a:t>
+            </a:r>
+            <a:r>
+              <a:rPr lang="en-US" b="1" i="1" dirty="0">
+                <a:latin typeface="Arial" panose="020B0604020202020204" pitchFamily="34" charset="0"/>
+                <a:cs typeface="Arial" panose="020B0604020202020204" pitchFamily="34" charset="0"/>
+              </a:rPr>
+              <a:t>#CORE1</a:t>
+            </a:r>
+          </a:p>
+        </p:txBody>
+      </p:sp>
+      <p:sp>
+        <p:nvSpPr>
+          <p:cNvPr id="3" name="TextBox 2">
+            <a:extLst>
+              <a:ext uri="{FF2B5EF4-FFF2-40B4-BE49-F238E27FC236}">
+                <a16:creationId xmlns:a16="http://schemas.microsoft.com/office/drawing/2014/main" id="{E07382BA-52D1-C4D8-38B0-6DA26CB7C3C5}"/>
+              </a:ext>
+            </a:extLst>
+          </p:cNvPr>
+          <p:cNvSpPr txBox="1"/>
+          <p:nvPr/>
+        </p:nvSpPr>
+        <p:spPr>
+          <a:xfrm>
+            <a:off x="5262077" y="1800942"/>
+            <a:ext cx="1101584" cy="1200329"/>
+          </a:xfrm>
+          <a:prstGeom prst="rect">
+            <a:avLst/>
+          </a:prstGeom>
+          <a:noFill/>
+        </p:spPr>
+        <p:txBody>
+          <a:bodyPr wrap="none" rtlCol="0">
+            <a:spAutoFit/>
+          </a:bodyPr>
+          <a:lstStyle/>
+          <a:p>
+            <a:pPr algn="ctr"/>
+            <a:r>
+              <a:rPr lang="en-US" sz="7200" dirty="0">
+                <a:latin typeface="Alice" panose="00000500000000000000" pitchFamily="2" charset="0"/>
+              </a:rPr>
+              <a:t>vs</a:t>
+            </a:r>
+          </a:p>
+        </p:txBody>
+      </p:sp>
+      <p:sp>
+        <p:nvSpPr>
+          <p:cNvPr id="8" name="TextBox 7">
+            <a:extLst>
+              <a:ext uri="{FF2B5EF4-FFF2-40B4-BE49-F238E27FC236}">
+                <a16:creationId xmlns:a16="http://schemas.microsoft.com/office/drawing/2014/main" id="{E813BEAF-0BE8-19AF-A1BA-8F7E45D23F3E}"/>
+              </a:ext>
+            </a:extLst>
+          </p:cNvPr>
+          <p:cNvSpPr txBox="1"/>
+          <p:nvPr/>
+        </p:nvSpPr>
+        <p:spPr>
+          <a:xfrm>
+            <a:off x="5345915" y="2615993"/>
+            <a:ext cx="6530955" cy="1862048"/>
+          </a:xfrm>
+          <a:prstGeom prst="rect">
+            <a:avLst/>
+          </a:prstGeom>
+          <a:noFill/>
+        </p:spPr>
+        <p:txBody>
+          <a:bodyPr wrap="none" rtlCol="0">
+            <a:spAutoFit/>
+          </a:bodyPr>
+          <a:lstStyle/>
+          <a:p>
+            <a:pPr algn="ctr"/>
+            <a:r>
+              <a:rPr lang="en-US" sz="11500" dirty="0">
+                <a:latin typeface="Alice" panose="00000500000000000000" pitchFamily="2" charset="0"/>
+              </a:rPr>
+              <a:t>Quantum</a:t>
+            </a:r>
+          </a:p>
+        </p:txBody>
+      </p:sp>
+      <p:pic>
+        <p:nvPicPr>
+          <p:cNvPr id="9" name="Picture 8">
+            <a:extLst>
+              <a:ext uri="{FF2B5EF4-FFF2-40B4-BE49-F238E27FC236}">
+                <a16:creationId xmlns:a16="http://schemas.microsoft.com/office/drawing/2014/main" id="{E008B0EC-319D-8203-69DE-37F05FE885A5}"/>
+              </a:ext>
+            </a:extLst>
+          </p:cNvPr>
+          <p:cNvPicPr>
+            <a:picLocks noChangeAspect="1"/>
+          </p:cNvPicPr>
+          <p:nvPr/>
+        </p:nvPicPr>
+        <p:blipFill>
+          <a:blip r:embed="rId3"/>
+          <a:srcRect b="33705"/>
+          <a:stretch>
+            <a:fillRect/>
+          </a:stretch>
+        </p:blipFill>
+        <p:spPr>
+          <a:xfrm>
+            <a:off x="2991594" y="4824012"/>
+            <a:ext cx="6378493" cy="1364059"/>
+          </a:xfrm>
+          <a:prstGeom prst="rect">
+            <a:avLst/>
+          </a:prstGeom>
+        </p:spPr>
+      </p:pic>
+    </p:spTree>
+    <p:extLst>
+      <p:ext uri="{BB962C8B-B14F-4D97-AF65-F5344CB8AC3E}">
+        <p14:creationId xmlns:p14="http://schemas.microsoft.com/office/powerpoint/2010/main" val="3807897762"/>
+      </p:ext>
+    </p:extLst>
+  </p:cSld>
+  <p:clrMapOvr>
+    <a:masterClrMapping/>
+  </p:clrMapOvr>
+</p:sld>
+</file>
+
+<file path=ppt/slides/slide4.xml><?xml version="1.0" encoding="utf-8"?>
+<p:sld xmlns:a="http://schemas.openxmlformats.org/drawingml/2006/main" xmlns:r="http://schemas.openxmlformats.org/officeDocument/2006/relationships" xmlns:p="http://schemas.openxmlformats.org/presentationml/2006/main">
+  <p:cSld>
+    <p:spTree>
+      <p:nvGrpSpPr>
+        <p:cNvPr id="1" name="">
+          <a:extLst>
+            <a:ext uri="{FF2B5EF4-FFF2-40B4-BE49-F238E27FC236}">
+              <a16:creationId xmlns:a16="http://schemas.microsoft.com/office/drawing/2014/main" id="{6B78C4BF-A834-1DB0-9FB5-7B65BEA34B4F}"/>
+            </a:ext>
+          </a:extLst>
+        </p:cNvPr>
+        <p:cNvGrpSpPr/>
+        <p:nvPr/>
+      </p:nvGrpSpPr>
+      <p:grpSpPr>
+        <a:xfrm>
+          <a:off x="0" y="0"/>
+          <a:ext cx="0" cy="0"/>
+          <a:chOff x="0" y="0"/>
+          <a:chExt cx="0" cy="0"/>
+        </a:xfrm>
+      </p:grpSpPr>
+      <p:pic>
+        <p:nvPicPr>
+          <p:cNvPr id="4" name="Picture 3">
+            <a:extLst>
+              <a:ext uri="{FF2B5EF4-FFF2-40B4-BE49-F238E27FC236}">
+                <a16:creationId xmlns:a16="http://schemas.microsoft.com/office/drawing/2014/main" id="{964995E7-1A14-F939-370C-3357B9185470}"/>
+              </a:ext>
+            </a:extLst>
+          </p:cNvPr>
+          <p:cNvPicPr>
+            <a:picLocks noChangeAspect="1"/>
+          </p:cNvPicPr>
+          <p:nvPr/>
+        </p:nvPicPr>
+        <p:blipFill>
+          <a:blip r:embed="rId2">
+            <a:extLst>
+              <a:ext uri="{28A0092B-C50C-407E-A947-70E740481C1C}">
+                <a14:useLocalDpi xmlns:a14="http://schemas.microsoft.com/office/drawing/2010/main" val="0"/>
+              </a:ext>
+            </a:extLst>
+          </a:blip>
+          <a:stretch>
+            <a:fillRect/>
+          </a:stretch>
+        </p:blipFill>
+        <p:spPr>
+          <a:xfrm>
+            <a:off x="10532823" y="5084976"/>
+            <a:ext cx="1208202" cy="1208202"/>
+          </a:xfrm>
+          <a:prstGeom prst="ellipse">
+            <a:avLst/>
+          </a:prstGeom>
+        </p:spPr>
+      </p:pic>
+      <p:sp>
+        <p:nvSpPr>
+          <p:cNvPr id="5" name="TextBox 4">
+            <a:extLst>
+              <a:ext uri="{FF2B5EF4-FFF2-40B4-BE49-F238E27FC236}">
+                <a16:creationId xmlns:a16="http://schemas.microsoft.com/office/drawing/2014/main" id="{8D733072-8C6E-2FF6-F20C-533B4F397774}"/>
+              </a:ext>
+            </a:extLst>
+          </p:cNvPr>
+          <p:cNvSpPr txBox="1"/>
+          <p:nvPr/>
+        </p:nvSpPr>
+        <p:spPr>
+          <a:xfrm>
+            <a:off x="10133284" y="6369476"/>
+            <a:ext cx="2007281" cy="253916"/>
+          </a:xfrm>
+          <a:prstGeom prst="rect">
+            <a:avLst/>
+          </a:prstGeom>
+          <a:noFill/>
+        </p:spPr>
+        <p:txBody>
+          <a:bodyPr wrap="none" rtlCol="0">
+            <a:spAutoFit/>
+          </a:bodyPr>
+          <a:lstStyle/>
+          <a:p>
+            <a:r>
+              <a:rPr lang="en-US" sz="1050" b="1" i="1" dirty="0">
+                <a:latin typeface="Arial" panose="020B0604020202020204" pitchFamily="34" charset="0"/>
+                <a:cs typeface="Arial" panose="020B0604020202020204" pitchFamily="34" charset="0"/>
+              </a:rPr>
+              <a:t>THEORIES OF EVERYTHING</a:t>
+            </a:r>
+          </a:p>
+        </p:txBody>
+      </p:sp>
+      <p:sp>
+        <p:nvSpPr>
+          <p:cNvPr id="6" name="TextBox 5">
+            <a:extLst>
+              <a:ext uri="{FF2B5EF4-FFF2-40B4-BE49-F238E27FC236}">
+                <a16:creationId xmlns:a16="http://schemas.microsoft.com/office/drawing/2014/main" id="{BA6B5DFD-EE84-1D80-4B3C-5E7DEA2726AE}"/>
+              </a:ext>
+            </a:extLst>
+          </p:cNvPr>
+          <p:cNvSpPr txBox="1"/>
+          <p:nvPr/>
+        </p:nvSpPr>
+        <p:spPr>
+          <a:xfrm>
+            <a:off x="10396978" y="4639346"/>
+            <a:ext cx="1479892" cy="369332"/>
+          </a:xfrm>
+          <a:prstGeom prst="rect">
+            <a:avLst/>
+          </a:prstGeom>
+          <a:noFill/>
+        </p:spPr>
+        <p:txBody>
+          <a:bodyPr wrap="none" rtlCol="0">
+            <a:spAutoFit/>
+          </a:bodyPr>
+          <a:lstStyle/>
+          <a:p>
+            <a:r>
+              <a:rPr lang="en-US" i="1" dirty="0">
+                <a:latin typeface="Arial" panose="020B0604020202020204" pitchFamily="34" charset="0"/>
+                <a:cs typeface="Arial" panose="020B0604020202020204" pitchFamily="34" charset="0"/>
+              </a:rPr>
+              <a:t>for </a:t>
+            </a:r>
+            <a:r>
+              <a:rPr lang="en-US" b="1" i="1" dirty="0">
+                <a:latin typeface="Arial" panose="020B0604020202020204" pitchFamily="34" charset="0"/>
+                <a:cs typeface="Arial" panose="020B0604020202020204" pitchFamily="34" charset="0"/>
+              </a:rPr>
+              <a:t>#CORE1</a:t>
+            </a:r>
+          </a:p>
+        </p:txBody>
+      </p:sp>
+      <p:graphicFrame>
+        <p:nvGraphicFramePr>
+          <p:cNvPr id="7" name="Table 6">
+            <a:extLst>
+              <a:ext uri="{FF2B5EF4-FFF2-40B4-BE49-F238E27FC236}">
+                <a16:creationId xmlns:a16="http://schemas.microsoft.com/office/drawing/2014/main" id="{02442370-A054-0AEF-6A0A-4B6368CDF97B}"/>
+              </a:ext>
+            </a:extLst>
+          </p:cNvPr>
+          <p:cNvGraphicFramePr>
+            <a:graphicFrameLocks noGrp="1"/>
+          </p:cNvGraphicFramePr>
+          <p:nvPr>
+            <p:extLst>
+              <p:ext uri="{D42A27DB-BD31-4B8C-83A1-F6EECF244321}">
+                <p14:modId xmlns:p14="http://schemas.microsoft.com/office/powerpoint/2010/main" val="705378672"/>
+              </p:ext>
+            </p:extLst>
+          </p:nvPr>
+        </p:nvGraphicFramePr>
+        <p:xfrm>
+          <a:off x="4021206" y="1061392"/>
+          <a:ext cx="6644788" cy="3298182"/>
+        </p:xfrm>
+        <a:graphic>
+          <a:graphicData uri="http://schemas.openxmlformats.org/drawingml/2006/table">
+            <a:tbl>
+              <a:tblPr firstRow="1" bandRow="1">
+                <a:tableStyleId>{2D5ABB26-0587-4C30-8999-92F81FD0307C}</a:tableStyleId>
+              </a:tblPr>
+              <a:tblGrid>
+                <a:gridCol w="3322394">
+                  <a:extLst>
+                    <a:ext uri="{9D8B030D-6E8A-4147-A177-3AD203B41FA5}">
+                      <a16:colId xmlns:a16="http://schemas.microsoft.com/office/drawing/2014/main" val="318984211"/>
+                    </a:ext>
+                  </a:extLst>
+                </a:gridCol>
+                <a:gridCol w="3322394">
+                  <a:extLst>
+                    <a:ext uri="{9D8B030D-6E8A-4147-A177-3AD203B41FA5}">
+                      <a16:colId xmlns:a16="http://schemas.microsoft.com/office/drawing/2014/main" val="4065757525"/>
+                    </a:ext>
+                  </a:extLst>
+                </a:gridCol>
+              </a:tblGrid>
+              <a:tr h="1649091">
+                <a:tc>
+                  <a:txBody>
+                    <a:bodyPr/>
+                    <a:lstStyle/>
+                    <a:p>
+                      <a:pPr algn="ctr"/>
+                      <a:r>
+                        <a:rPr lang="en-US" sz="3600" b="0" dirty="0"/>
+                        <a:t>Classical</a:t>
+                      </a:r>
+                      <a:br>
+                        <a:rPr lang="en-US" sz="3600" b="0" dirty="0"/>
+                      </a:br>
+                      <a:r>
+                        <a:rPr lang="en-US" sz="3600" b="0" dirty="0"/>
+                        <a:t>Mechanics</a:t>
+                      </a:r>
+                    </a:p>
+                  </a:txBody>
+                  <a:tcPr anchor="ctr">
+                    <a:lnL w="12700" cap="flat" cmpd="sng" algn="ctr">
+                      <a:solidFill>
+                        <a:schemeClr val="tx1"/>
+                      </a:solidFill>
+                      <a:prstDash val="solid"/>
+                      <a:round/>
+                      <a:headEnd type="none" w="med" len="med"/>
+                      <a:tailEnd type="none" w="med" len="med"/>
+                    </a:lnL>
+                    <a:lnR w="12700" cap="flat" cmpd="sng" algn="ctr">
+                      <a:solidFill>
+                        <a:schemeClr val="tx1"/>
+                      </a:solidFill>
+                      <a:prstDash val="solid"/>
+                      <a:round/>
+                      <a:headEnd type="none" w="med" len="med"/>
+                      <a:tailEnd type="none" w="med" len="med"/>
+                    </a:lnR>
+                    <a:lnT w="12700" cap="flat" cmpd="sng" algn="ctr">
+                      <a:solidFill>
+                        <a:schemeClr val="tx1"/>
+                      </a:solidFill>
+                      <a:prstDash val="solid"/>
+                      <a:round/>
+                      <a:headEnd type="none" w="med" len="med"/>
+                      <a:tailEnd type="none" w="med" len="med"/>
+                    </a:lnT>
+                    <a:lnB w="12700" cap="flat" cmpd="sng" algn="ctr">
+                      <a:solidFill>
+                        <a:schemeClr val="tx1"/>
+                      </a:solidFill>
+                      <a:prstDash val="solid"/>
+                      <a:round/>
+                      <a:headEnd type="none" w="med" len="med"/>
+                      <a:tailEnd type="none" w="med" len="med"/>
+                    </a:lnB>
+                  </a:tcPr>
+                </a:tc>
+                <a:tc>
+                  <a:txBody>
+                    <a:bodyPr/>
+                    <a:lstStyle/>
+                    <a:p>
+                      <a:pPr algn="ctr"/>
+                      <a:r>
+                        <a:rPr lang="en-US" sz="3600" b="0" dirty="0"/>
+                        <a:t>Relativistic</a:t>
+                      </a:r>
+                      <a:br>
+                        <a:rPr lang="en-US" sz="3600" b="0" dirty="0"/>
+                      </a:br>
+                      <a:r>
+                        <a:rPr lang="en-US" sz="3600" b="0" dirty="0"/>
+                        <a:t>Mechanics</a:t>
+                      </a:r>
+                    </a:p>
+                  </a:txBody>
+                  <a:tcPr anchor="ctr">
+                    <a:lnL w="12700" cap="flat" cmpd="sng" algn="ctr">
+                      <a:solidFill>
+                        <a:schemeClr val="tx1"/>
+                      </a:solidFill>
+                      <a:prstDash val="solid"/>
+                      <a:round/>
+                      <a:headEnd type="none" w="med" len="med"/>
+                      <a:tailEnd type="none" w="med" len="med"/>
+                    </a:lnL>
+                    <a:lnR w="12700" cap="flat" cmpd="sng" algn="ctr">
+                      <a:solidFill>
+                        <a:schemeClr val="tx1"/>
+                      </a:solidFill>
+                      <a:prstDash val="solid"/>
+                      <a:round/>
+                      <a:headEnd type="none" w="med" len="med"/>
+                      <a:tailEnd type="none" w="med" len="med"/>
+                    </a:lnR>
+                    <a:lnT w="12700" cap="flat" cmpd="sng" algn="ctr">
+                      <a:solidFill>
+                        <a:schemeClr val="tx1"/>
+                      </a:solidFill>
+                      <a:prstDash val="solid"/>
+                      <a:round/>
+                      <a:headEnd type="none" w="med" len="med"/>
+                      <a:tailEnd type="none" w="med" len="med"/>
+                    </a:lnT>
+                    <a:lnB w="12700" cap="flat" cmpd="sng" algn="ctr">
+                      <a:solidFill>
+                        <a:schemeClr val="tx1"/>
+                      </a:solidFill>
+                      <a:prstDash val="solid"/>
+                      <a:round/>
+                      <a:headEnd type="none" w="med" len="med"/>
+                      <a:tailEnd type="none" w="med" len="med"/>
+                    </a:lnB>
+                  </a:tcPr>
+                </a:tc>
+                <a:extLst>
+                  <a:ext uri="{0D108BD9-81ED-4DB2-BD59-A6C34878D82A}">
+                    <a16:rowId xmlns:a16="http://schemas.microsoft.com/office/drawing/2014/main" val="144742816"/>
+                  </a:ext>
+                </a:extLst>
+              </a:tr>
+              <a:tr h="1649091">
+                <a:tc>
+                  <a:txBody>
+                    <a:bodyPr/>
+                    <a:lstStyle/>
+                    <a:p>
+                      <a:pPr algn="ctr"/>
+                      <a:r>
+                        <a:rPr lang="en-US" sz="3600" b="0" dirty="0"/>
+                        <a:t>Quantum</a:t>
+                      </a:r>
+                      <a:br>
+                        <a:rPr lang="en-US" sz="3600" b="0" dirty="0"/>
+                      </a:br>
+                      <a:r>
+                        <a:rPr lang="en-US" sz="3600" b="0" dirty="0"/>
+                        <a:t>Mechanics</a:t>
+                      </a:r>
+                    </a:p>
+                  </a:txBody>
+                  <a:tcPr anchor="ctr">
+                    <a:lnL w="12700" cap="flat" cmpd="sng" algn="ctr">
+                      <a:solidFill>
+                        <a:schemeClr val="tx1"/>
+                      </a:solidFill>
+                      <a:prstDash val="solid"/>
+                      <a:round/>
+                      <a:headEnd type="none" w="med" len="med"/>
+                      <a:tailEnd type="none" w="med" len="med"/>
+                    </a:lnL>
+                    <a:lnR w="12700" cap="flat" cmpd="sng" algn="ctr">
+                      <a:solidFill>
+                        <a:schemeClr val="tx1"/>
+                      </a:solidFill>
+                      <a:prstDash val="solid"/>
+                      <a:round/>
+                      <a:headEnd type="none" w="med" len="med"/>
+                      <a:tailEnd type="none" w="med" len="med"/>
+                    </a:lnR>
+                    <a:lnT w="12700" cap="flat" cmpd="sng" algn="ctr">
+                      <a:solidFill>
+                        <a:schemeClr val="tx1"/>
+                      </a:solidFill>
+                      <a:prstDash val="solid"/>
+                      <a:round/>
+                      <a:headEnd type="none" w="med" len="med"/>
+                      <a:tailEnd type="none" w="med" len="med"/>
+                    </a:lnT>
+                    <a:lnB w="12700" cap="flat" cmpd="sng" algn="ctr">
+                      <a:solidFill>
+                        <a:schemeClr val="tx1"/>
+                      </a:solidFill>
+                      <a:prstDash val="solid"/>
+                      <a:round/>
+                      <a:headEnd type="none" w="med" len="med"/>
+                      <a:tailEnd type="none" w="med" len="med"/>
+                    </a:lnB>
+                  </a:tcPr>
+                </a:tc>
+                <a:tc>
+                  <a:txBody>
+                    <a:bodyPr/>
+                    <a:lstStyle/>
+                    <a:p>
+                      <a:pPr algn="ctr"/>
+                      <a:r>
+                        <a:rPr lang="en-US" sz="3600" b="0" dirty="0"/>
+                        <a:t>Quantum</a:t>
+                      </a:r>
+                      <a:br>
+                        <a:rPr lang="en-US" sz="3600" b="0" dirty="0"/>
+                      </a:br>
+                      <a:r>
+                        <a:rPr lang="en-US" sz="3600" b="0" dirty="0"/>
+                        <a:t>Field Theory</a:t>
+                      </a:r>
+                    </a:p>
+                  </a:txBody>
+                  <a:tcPr anchor="ctr">
+                    <a:lnL w="12700" cap="flat" cmpd="sng" algn="ctr">
+                      <a:solidFill>
+                        <a:schemeClr val="tx1"/>
+                      </a:solidFill>
+                      <a:prstDash val="solid"/>
+                      <a:round/>
+                      <a:headEnd type="none" w="med" len="med"/>
+                      <a:tailEnd type="none" w="med" len="med"/>
+                    </a:lnL>
+                    <a:lnR w="12700" cap="flat" cmpd="sng" algn="ctr">
+                      <a:solidFill>
+                        <a:schemeClr val="tx1"/>
+                      </a:solidFill>
+                      <a:prstDash val="solid"/>
+                      <a:round/>
+                      <a:headEnd type="none" w="med" len="med"/>
+                      <a:tailEnd type="none" w="med" len="med"/>
+                    </a:lnR>
+                    <a:lnT w="12700" cap="flat" cmpd="sng" algn="ctr">
+                      <a:solidFill>
+                        <a:schemeClr val="tx1"/>
+                      </a:solidFill>
+                      <a:prstDash val="solid"/>
+                      <a:round/>
+                      <a:headEnd type="none" w="med" len="med"/>
+                      <a:tailEnd type="none" w="med" len="med"/>
+                    </a:lnT>
+                    <a:lnB w="12700" cap="flat" cmpd="sng" algn="ctr">
+                      <a:solidFill>
+                        <a:schemeClr val="tx1"/>
+                      </a:solidFill>
+                      <a:prstDash val="solid"/>
+                      <a:round/>
+                      <a:headEnd type="none" w="med" len="med"/>
+                      <a:tailEnd type="none" w="med" len="med"/>
+                    </a:lnB>
+                  </a:tcPr>
+                </a:tc>
+                <a:extLst>
+                  <a:ext uri="{0D108BD9-81ED-4DB2-BD59-A6C34878D82A}">
+                    <a16:rowId xmlns:a16="http://schemas.microsoft.com/office/drawing/2014/main" val="1970478271"/>
+                  </a:ext>
+                </a:extLst>
+              </a:tr>
+            </a:tbl>
+          </a:graphicData>
+        </a:graphic>
+      </p:graphicFrame>
+      <p:cxnSp>
+        <p:nvCxnSpPr>
+          <p:cNvPr id="9" name="Straight Arrow Connector 8">
+            <a:extLst>
+              <a:ext uri="{FF2B5EF4-FFF2-40B4-BE49-F238E27FC236}">
+                <a16:creationId xmlns:a16="http://schemas.microsoft.com/office/drawing/2014/main" id="{924D4C45-3445-545D-BB30-B7A979090E33}"/>
+              </a:ext>
+            </a:extLst>
+          </p:cNvPr>
+          <p:cNvCxnSpPr/>
+          <p:nvPr/>
+        </p:nvCxnSpPr>
+        <p:spPr>
+          <a:xfrm>
+            <a:off x="4024913" y="762041"/>
+            <a:ext cx="6621057" cy="0"/>
+          </a:xfrm>
+          <a:prstGeom prst="straightConnector1">
+            <a:avLst/>
+          </a:prstGeom>
+          <a:ln w="12700">
+            <a:tailEnd type="triangle" w="lg" len="lg"/>
+          </a:ln>
+        </p:spPr>
+        <p:style>
+          <a:lnRef idx="1">
+            <a:schemeClr val="dk1"/>
+          </a:lnRef>
+          <a:fillRef idx="0">
+            <a:schemeClr val="dk1"/>
+          </a:fillRef>
+          <a:effectRef idx="0">
+            <a:schemeClr val="dk1"/>
+          </a:effectRef>
+          <a:fontRef idx="minor">
+            <a:schemeClr val="tx1"/>
+          </a:fontRef>
+        </p:style>
+      </p:cxnSp>
+      <p:sp>
+        <p:nvSpPr>
+          <p:cNvPr id="10" name="TextBox 9">
+            <a:extLst>
+              <a:ext uri="{FF2B5EF4-FFF2-40B4-BE49-F238E27FC236}">
+                <a16:creationId xmlns:a16="http://schemas.microsoft.com/office/drawing/2014/main" id="{1A0F678A-2222-5487-E445-BD8FE85B2925}"/>
+              </a:ext>
+            </a:extLst>
+          </p:cNvPr>
+          <p:cNvSpPr txBox="1"/>
+          <p:nvPr/>
+        </p:nvSpPr>
+        <p:spPr>
+          <a:xfrm>
+            <a:off x="6661362" y="149174"/>
+            <a:ext cx="1364476" cy="646331"/>
+          </a:xfrm>
+          <a:prstGeom prst="rect">
+            <a:avLst/>
+          </a:prstGeom>
+          <a:noFill/>
+        </p:spPr>
+        <p:txBody>
+          <a:bodyPr wrap="none" rtlCol="0">
+            <a:spAutoFit/>
+          </a:bodyPr>
+          <a:lstStyle/>
+          <a:p>
+            <a:r>
+              <a:rPr lang="en-US" sz="3600" b="1" dirty="0"/>
+              <a:t>Speed</a:t>
+            </a:r>
+          </a:p>
+        </p:txBody>
+      </p:sp>
+      <p:cxnSp>
+        <p:nvCxnSpPr>
+          <p:cNvPr id="11" name="Straight Arrow Connector 10">
+            <a:extLst>
+              <a:ext uri="{FF2B5EF4-FFF2-40B4-BE49-F238E27FC236}">
+                <a16:creationId xmlns:a16="http://schemas.microsoft.com/office/drawing/2014/main" id="{BA01D885-2795-9762-364D-16F6B879B2A1}"/>
+              </a:ext>
+            </a:extLst>
+          </p:cNvPr>
+          <p:cNvCxnSpPr>
+            <a:cxnSpLocks/>
+          </p:cNvCxnSpPr>
+          <p:nvPr/>
+        </p:nvCxnSpPr>
+        <p:spPr>
+          <a:xfrm flipV="1">
+            <a:off x="3711215" y="1054718"/>
+            <a:ext cx="0" cy="3298182"/>
+          </a:xfrm>
+          <a:prstGeom prst="straightConnector1">
+            <a:avLst/>
+          </a:prstGeom>
+          <a:ln w="12700">
+            <a:tailEnd type="triangle" w="lg" len="lg"/>
+          </a:ln>
+        </p:spPr>
+        <p:style>
+          <a:lnRef idx="1">
+            <a:schemeClr val="dk1"/>
+          </a:lnRef>
+          <a:fillRef idx="0">
+            <a:schemeClr val="dk1"/>
+          </a:fillRef>
+          <a:effectRef idx="0">
+            <a:schemeClr val="dk1"/>
+          </a:effectRef>
+          <a:fontRef idx="minor">
+            <a:schemeClr val="tx1"/>
+          </a:fontRef>
+        </p:style>
+      </p:cxnSp>
+      <p:sp>
+        <p:nvSpPr>
+          <p:cNvPr id="12" name="TextBox 11">
+            <a:extLst>
+              <a:ext uri="{FF2B5EF4-FFF2-40B4-BE49-F238E27FC236}">
+                <a16:creationId xmlns:a16="http://schemas.microsoft.com/office/drawing/2014/main" id="{C348E37C-DF07-C299-F456-9A7140011A9C}"/>
+              </a:ext>
+            </a:extLst>
+          </p:cNvPr>
+          <p:cNvSpPr txBox="1"/>
+          <p:nvPr/>
+        </p:nvSpPr>
+        <p:spPr>
+          <a:xfrm rot="16200000">
+            <a:off x="2988906" y="2418096"/>
+            <a:ext cx="824649" cy="584775"/>
+          </a:xfrm>
+          <a:prstGeom prst="rect">
+            <a:avLst/>
+          </a:prstGeom>
+          <a:noFill/>
+        </p:spPr>
+        <p:txBody>
+          <a:bodyPr wrap="none" rtlCol="0">
+            <a:spAutoFit/>
+          </a:bodyPr>
+          <a:lstStyle/>
+          <a:p>
+            <a:r>
+              <a:rPr lang="en-US" sz="3200" dirty="0"/>
+              <a:t>Size</a:t>
+            </a:r>
+          </a:p>
+        </p:txBody>
+      </p:sp>
+      <mc:AlternateContent xmlns:mc="http://schemas.openxmlformats.org/markup-compatibility/2006">
+        <mc:Choice xmlns:a14="http://schemas.microsoft.com/office/drawing/2010/main" Requires="a14">
+          <p:sp>
+            <p:nvSpPr>
+              <p:cNvPr id="13" name="TextBox 12">
+                <a:extLst>
+                  <a:ext uri="{FF2B5EF4-FFF2-40B4-BE49-F238E27FC236}">
+                    <a16:creationId xmlns:a16="http://schemas.microsoft.com/office/drawing/2014/main" id="{691606CA-73CF-625C-5A51-74B34949F3B0}"/>
+                  </a:ext>
+                </a:extLst>
+              </p:cNvPr>
+              <p:cNvSpPr txBox="1"/>
+              <p:nvPr/>
+            </p:nvSpPr>
+            <p:spPr>
+              <a:xfrm>
+                <a:off x="4021206" y="472340"/>
+                <a:ext cx="730328" cy="276999"/>
+              </a:xfrm>
+              <a:prstGeom prst="rect">
+                <a:avLst/>
+              </a:prstGeom>
+              <a:noFill/>
+            </p:spPr>
+            <p:txBody>
+              <a:bodyPr wrap="none" rtlCol="0">
+                <a:spAutoFit/>
+              </a:bodyPr>
+              <a:lstStyle/>
+              <a:p>
+                <a:r>
+                  <a:rPr lang="en-US" sz="1200" b="0" dirty="0"/>
+                  <a:t>“</a:t>
+                </a:r>
+                <a14:m>
+                  <m:oMath xmlns:m="http://schemas.openxmlformats.org/officeDocument/2006/math">
+                    <m:r>
+                      <a:rPr lang="en-US" sz="1200" b="0" i="1" smtClean="0">
+                        <a:latin typeface="Cambria Math" panose="02040503050406030204" pitchFamily="18" charset="0"/>
+                      </a:rPr>
+                      <m:t>𝑐</m:t>
+                    </m:r>
+                    <m:r>
+                      <a:rPr lang="en-US" sz="1200" b="0" i="1" smtClean="0">
+                        <a:latin typeface="Cambria Math" panose="02040503050406030204" pitchFamily="18" charset="0"/>
+                      </a:rPr>
+                      <m:t>→∞</m:t>
+                    </m:r>
+                  </m:oMath>
+                </a14:m>
+                <a:r>
+                  <a:rPr lang="en-US" sz="1200" dirty="0"/>
+                  <a:t>”</a:t>
+                </a:r>
+              </a:p>
+            </p:txBody>
+          </p:sp>
+        </mc:Choice>
+        <mc:Fallback>
+          <p:sp>
+            <p:nvSpPr>
+              <p:cNvPr id="13" name="TextBox 12">
+                <a:extLst>
+                  <a:ext uri="{FF2B5EF4-FFF2-40B4-BE49-F238E27FC236}">
+                    <a16:creationId xmlns:a16="http://schemas.microsoft.com/office/drawing/2014/main" id="{691606CA-73CF-625C-5A51-74B34949F3B0}"/>
+                  </a:ext>
+                </a:extLst>
+              </p:cNvPr>
+              <p:cNvSpPr txBox="1">
+                <a:spLocks noRot="1" noChangeAspect="1" noMove="1" noResize="1" noEditPoints="1" noAdjustHandles="1" noChangeArrowheads="1" noChangeShapeType="1" noTextEdit="1"/>
+              </p:cNvSpPr>
+              <p:nvPr/>
+            </p:nvSpPr>
+            <p:spPr>
+              <a:xfrm>
+                <a:off x="4021206" y="472340"/>
+                <a:ext cx="730328" cy="276999"/>
+              </a:xfrm>
+              <a:prstGeom prst="rect">
+                <a:avLst/>
+              </a:prstGeom>
+              <a:blipFill>
+                <a:blip r:embed="rId3"/>
+                <a:stretch>
+                  <a:fillRect l="-840" b="-15217"/>
+                </a:stretch>
+              </a:blipFill>
+            </p:spPr>
+            <p:txBody>
+              <a:bodyPr/>
+              <a:lstStyle/>
+              <a:p>
+                <a:r>
+                  <a:rPr lang="en-US">
+                    <a:noFill/>
+                  </a:rPr>
+                  <a:t> </a:t>
+                </a:r>
+              </a:p>
+            </p:txBody>
+          </p:sp>
+        </mc:Fallback>
+      </mc:AlternateContent>
+      <mc:AlternateContent xmlns:mc="http://schemas.openxmlformats.org/markup-compatibility/2006">
+        <mc:Choice xmlns:a14="http://schemas.microsoft.com/office/drawing/2010/main" Requires="a14">
+          <p:sp>
+            <p:nvSpPr>
+              <p:cNvPr id="14" name="TextBox 13">
+                <a:extLst>
+                  <a:ext uri="{FF2B5EF4-FFF2-40B4-BE49-F238E27FC236}">
+                    <a16:creationId xmlns:a16="http://schemas.microsoft.com/office/drawing/2014/main" id="{DEA2CC9A-4033-20DE-C356-24B6C605B455}"/>
+                  </a:ext>
+                </a:extLst>
+              </p:cNvPr>
+              <p:cNvSpPr txBox="1"/>
+              <p:nvPr/>
+            </p:nvSpPr>
+            <p:spPr>
+              <a:xfrm rot="16200000">
+                <a:off x="3098291" y="1220436"/>
+                <a:ext cx="698204" cy="276999"/>
+              </a:xfrm>
+              <a:prstGeom prst="rect">
+                <a:avLst/>
+              </a:prstGeom>
+              <a:noFill/>
+            </p:spPr>
+            <p:txBody>
+              <a:bodyPr wrap="none" rtlCol="0">
+                <a:spAutoFit/>
+              </a:bodyPr>
+              <a:lstStyle/>
+              <a:p>
+                <a:r>
+                  <a:rPr lang="en-US" sz="1200" b="0" dirty="0"/>
+                  <a:t>“</a:t>
+                </a:r>
+                <a14:m>
+                  <m:oMath xmlns:m="http://schemas.openxmlformats.org/officeDocument/2006/math">
+                    <m:r>
+                      <a:rPr lang="en-US" sz="1200" b="0" i="1" smtClean="0">
+                        <a:latin typeface="Cambria Math" panose="02040503050406030204" pitchFamily="18" charset="0"/>
+                      </a:rPr>
+                      <m:t>ℏ→0</m:t>
+                    </m:r>
+                  </m:oMath>
+                </a14:m>
+                <a:r>
+                  <a:rPr lang="en-US" sz="1200" dirty="0"/>
+                  <a:t>”</a:t>
+                </a:r>
+              </a:p>
+            </p:txBody>
+          </p:sp>
+        </mc:Choice>
+        <mc:Fallback>
+          <p:sp>
+            <p:nvSpPr>
+              <p:cNvPr id="14" name="TextBox 13">
+                <a:extLst>
+                  <a:ext uri="{FF2B5EF4-FFF2-40B4-BE49-F238E27FC236}">
+                    <a16:creationId xmlns:a16="http://schemas.microsoft.com/office/drawing/2014/main" id="{DEA2CC9A-4033-20DE-C356-24B6C605B455}"/>
+                  </a:ext>
+                </a:extLst>
+              </p:cNvPr>
+              <p:cNvSpPr txBox="1">
+                <a:spLocks noRot="1" noChangeAspect="1" noMove="1" noResize="1" noEditPoints="1" noAdjustHandles="1" noChangeArrowheads="1" noChangeShapeType="1" noTextEdit="1"/>
+              </p:cNvSpPr>
+              <p:nvPr/>
+            </p:nvSpPr>
+            <p:spPr>
+              <a:xfrm rot="16200000">
+                <a:off x="3098291" y="1220436"/>
+                <a:ext cx="698204" cy="276999"/>
+              </a:xfrm>
+              <a:prstGeom prst="rect">
+                <a:avLst/>
+              </a:prstGeom>
+              <a:blipFill>
+                <a:blip r:embed="rId4"/>
+                <a:stretch>
+                  <a:fillRect l="-2222" r="-17778" b="-877"/>
+                </a:stretch>
+              </a:blipFill>
+            </p:spPr>
+            <p:txBody>
+              <a:bodyPr/>
+              <a:lstStyle/>
+              <a:p>
+                <a:r>
+                  <a:rPr lang="en-US">
+                    <a:noFill/>
+                  </a:rPr>
+                  <a:t> </a:t>
+                </a:r>
+              </a:p>
+            </p:txBody>
+          </p:sp>
+        </mc:Fallback>
+      </mc:AlternateContent>
+      <p:sp>
+        <p:nvSpPr>
+          <p:cNvPr id="15" name="TextBox 14">
+            <a:extLst>
+              <a:ext uri="{FF2B5EF4-FFF2-40B4-BE49-F238E27FC236}">
+                <a16:creationId xmlns:a16="http://schemas.microsoft.com/office/drawing/2014/main" id="{6D855A6E-3BCD-9760-B568-13412918C6D1}"/>
+              </a:ext>
+            </a:extLst>
+          </p:cNvPr>
+          <p:cNvSpPr txBox="1"/>
+          <p:nvPr/>
+        </p:nvSpPr>
+        <p:spPr>
+          <a:xfrm>
+            <a:off x="3905661" y="234608"/>
+            <a:ext cx="961417" cy="307777"/>
+          </a:xfrm>
+          <a:prstGeom prst="rect">
+            <a:avLst/>
+          </a:prstGeom>
+          <a:noFill/>
+        </p:spPr>
+        <p:txBody>
+          <a:bodyPr wrap="none" rtlCol="0">
+            <a:spAutoFit/>
+          </a:bodyPr>
+          <a:lstStyle/>
+          <a:p>
+            <a:r>
+              <a:rPr lang="en-US" sz="1400" dirty="0"/>
+              <a:t>Low speed</a:t>
+            </a:r>
+          </a:p>
+        </p:txBody>
+      </p:sp>
+      <p:cxnSp>
+        <p:nvCxnSpPr>
+          <p:cNvPr id="16" name="Straight Connector 15">
+            <a:extLst>
+              <a:ext uri="{FF2B5EF4-FFF2-40B4-BE49-F238E27FC236}">
+                <a16:creationId xmlns:a16="http://schemas.microsoft.com/office/drawing/2014/main" id="{1117BC32-EA98-5456-DEBD-DB182B8BA235}"/>
+              </a:ext>
+            </a:extLst>
+          </p:cNvPr>
+          <p:cNvCxnSpPr/>
+          <p:nvPr/>
+        </p:nvCxnSpPr>
+        <p:spPr>
+          <a:xfrm>
+            <a:off x="3216563" y="2438003"/>
+            <a:ext cx="369330" cy="616973"/>
+          </a:xfrm>
+          <a:prstGeom prst="line">
+            <a:avLst/>
+          </a:prstGeom>
+          <a:ln w="76200">
+            <a:solidFill>
+              <a:srgbClr val="C00000"/>
+            </a:solidFill>
+          </a:ln>
+        </p:spPr>
+        <p:style>
+          <a:lnRef idx="1">
+            <a:schemeClr val="accent1"/>
+          </a:lnRef>
+          <a:fillRef idx="0">
+            <a:schemeClr val="accent1"/>
+          </a:fillRef>
+          <a:effectRef idx="0">
+            <a:schemeClr val="accent1"/>
+          </a:effectRef>
+          <a:fontRef idx="minor">
+            <a:schemeClr val="tx1"/>
+          </a:fontRef>
+        </p:style>
+      </p:cxnSp>
+      <p:sp>
+        <p:nvSpPr>
+          <p:cNvPr id="17" name="TextBox 16">
+            <a:extLst>
+              <a:ext uri="{FF2B5EF4-FFF2-40B4-BE49-F238E27FC236}">
+                <a16:creationId xmlns:a16="http://schemas.microsoft.com/office/drawing/2014/main" id="{FA47D12B-B7E8-C2B8-8A0F-23E6DE96F045}"/>
+              </a:ext>
+            </a:extLst>
+          </p:cNvPr>
+          <p:cNvSpPr txBox="1"/>
+          <p:nvPr/>
+        </p:nvSpPr>
+        <p:spPr>
+          <a:xfrm rot="16200000">
+            <a:off x="834825" y="2411422"/>
+            <a:ext cx="4143507" cy="584775"/>
+          </a:xfrm>
+          <a:prstGeom prst="rect">
+            <a:avLst/>
+          </a:prstGeom>
+          <a:noFill/>
+        </p:spPr>
+        <p:txBody>
+          <a:bodyPr wrap="none" rtlCol="0">
+            <a:spAutoFit/>
+          </a:bodyPr>
+          <a:lstStyle/>
+          <a:p>
+            <a:r>
+              <a:rPr lang="en-US" sz="3200" dirty="0" err="1"/>
+              <a:t>Numebr</a:t>
+            </a:r>
+            <a:r>
+              <a:rPr lang="en-US" sz="3200" dirty="0"/>
+              <a:t> of constituents</a:t>
+            </a:r>
+          </a:p>
+        </p:txBody>
+      </p:sp>
+      <p:cxnSp>
+        <p:nvCxnSpPr>
+          <p:cNvPr id="18" name="Straight Connector 17">
+            <a:extLst>
+              <a:ext uri="{FF2B5EF4-FFF2-40B4-BE49-F238E27FC236}">
+                <a16:creationId xmlns:a16="http://schemas.microsoft.com/office/drawing/2014/main" id="{6A7DD6AA-94F5-EF9A-2A10-DD345806CCBA}"/>
+              </a:ext>
+            </a:extLst>
+          </p:cNvPr>
+          <p:cNvCxnSpPr>
+            <a:cxnSpLocks/>
+          </p:cNvCxnSpPr>
+          <p:nvPr/>
+        </p:nvCxnSpPr>
+        <p:spPr>
+          <a:xfrm>
+            <a:off x="2721915" y="1690092"/>
+            <a:ext cx="339652" cy="1947561"/>
+          </a:xfrm>
+          <a:prstGeom prst="line">
+            <a:avLst/>
+          </a:prstGeom>
+          <a:ln w="76200">
+            <a:solidFill>
+              <a:srgbClr val="C00000"/>
+            </a:solidFill>
+          </a:ln>
+        </p:spPr>
+        <p:style>
+          <a:lnRef idx="1">
+            <a:schemeClr val="accent1"/>
+          </a:lnRef>
+          <a:fillRef idx="0">
+            <a:schemeClr val="accent1"/>
+          </a:fillRef>
+          <a:effectRef idx="0">
+            <a:schemeClr val="accent1"/>
+          </a:effectRef>
+          <a:fontRef idx="minor">
+            <a:schemeClr val="tx1"/>
+          </a:fontRef>
+        </p:style>
+      </p:cxnSp>
+      <p:sp>
+        <p:nvSpPr>
+          <p:cNvPr id="19" name="TextBox 18">
+            <a:extLst>
+              <a:ext uri="{FF2B5EF4-FFF2-40B4-BE49-F238E27FC236}">
+                <a16:creationId xmlns:a16="http://schemas.microsoft.com/office/drawing/2014/main" id="{DA5BFACD-FF42-7278-55BB-F4BD9BBF9F41}"/>
+              </a:ext>
+            </a:extLst>
+          </p:cNvPr>
+          <p:cNvSpPr txBox="1"/>
+          <p:nvPr/>
+        </p:nvSpPr>
+        <p:spPr>
+          <a:xfrm rot="16200000">
+            <a:off x="321208" y="1990397"/>
+            <a:ext cx="2934073" cy="1015663"/>
+          </a:xfrm>
+          <a:prstGeom prst="rect">
+            <a:avLst/>
+          </a:prstGeom>
+          <a:noFill/>
+        </p:spPr>
+        <p:txBody>
+          <a:bodyPr wrap="none" rtlCol="0">
+            <a:spAutoFit/>
+          </a:bodyPr>
+          <a:lstStyle/>
+          <a:p>
+            <a:r>
+              <a:rPr lang="en-US" sz="6000" b="1" dirty="0"/>
+              <a:t>Entropy!</a:t>
+            </a:r>
+          </a:p>
+        </p:txBody>
+      </p:sp>
+      <p:pic>
+        <p:nvPicPr>
+          <p:cNvPr id="20" name="Picture 19">
+            <a:extLst>
+              <a:ext uri="{FF2B5EF4-FFF2-40B4-BE49-F238E27FC236}">
+                <a16:creationId xmlns:a16="http://schemas.microsoft.com/office/drawing/2014/main" id="{970CB207-AE73-FD41-8130-1477979713A7}"/>
+              </a:ext>
+            </a:extLst>
+          </p:cNvPr>
+          <p:cNvPicPr>
+            <a:picLocks noChangeAspect="1"/>
+          </p:cNvPicPr>
+          <p:nvPr/>
+        </p:nvPicPr>
+        <p:blipFill>
+          <a:blip r:embed="rId5"/>
+          <a:srcRect b="33705"/>
+          <a:stretch>
+            <a:fillRect/>
+          </a:stretch>
+        </p:blipFill>
+        <p:spPr>
+          <a:xfrm>
+            <a:off x="2991594" y="4955990"/>
+            <a:ext cx="6378493" cy="1364059"/>
+          </a:xfrm>
+          <a:prstGeom prst="rect">
+            <a:avLst/>
+          </a:prstGeom>
+        </p:spPr>
+      </p:pic>
+    </p:spTree>
+    <p:extLst>
+      <p:ext uri="{BB962C8B-B14F-4D97-AF65-F5344CB8AC3E}">
+        <p14:creationId xmlns:p14="http://schemas.microsoft.com/office/powerpoint/2010/main" val="217452915"/>
+      </p:ext>
+    </p:extLst>
+  </p:cSld>
+  <p:clrMapOvr>
+    <a:masterClrMapping/>
+  </p:clrMapOvr>
+  <p:timing>
+    <p:tnLst>
+      <p:par>
+        <p:cTn id="1" dur="indefinite" restart="never" nodeType="tmRoot">
+          <p:childTnLst>
+            <p:seq concurrent="1" nextAc="seek">
+              <p:cTn id="2" dur="indefinite" nodeType="mainSeq">
+                <p:childTnLst>
+                  <p:par>
+                    <p:cTn id="3" fill="hold">
+                      <p:stCondLst>
+                        <p:cond delay="indefinite"/>
+                      </p:stCondLst>
+                      <p:childTnLst>
+                        <p:par>
+                          <p:cTn id="4" fill="hold">
+                            <p:stCondLst>
+                              <p:cond delay="0"/>
+                            </p:stCondLst>
+                            <p:childTnLst>
+                              <p:par>
+                                <p:cTn id="5" presetID="1" presetClass="entr" presetSubtype="0" fill="hold" nodeType="clickEffect">
+                                  <p:stCondLst>
+                                    <p:cond delay="0"/>
+                                  </p:stCondLst>
+                                  <p:childTnLst>
+                                    <p:set>
+                                      <p:cBhvr>
+                                        <p:cTn id="6" dur="1" fill="hold">
+                                          <p:stCondLst>
+                                            <p:cond delay="0"/>
+                                          </p:stCondLst>
+                                        </p:cTn>
+                                        <p:tgtEl>
+                                          <p:spTgt spid="16"/>
+                                        </p:tgtEl>
+                                        <p:attrNameLst>
+                                          <p:attrName>style.visibility</p:attrName>
+                                        </p:attrNameLst>
+                                      </p:cBhvr>
+                                      <p:to>
+                                        <p:strVal val="visible"/>
+                                      </p:to>
+                                    </p:set>
+                                  </p:childTnLst>
+                                </p:cTn>
+                              </p:par>
+                            </p:childTnLst>
+                          </p:cTn>
+                        </p:par>
+                      </p:childTnLst>
+                    </p:cTn>
+                  </p:par>
+                  <p:par>
+                    <p:cTn id="7" fill="hold">
+                      <p:stCondLst>
+                        <p:cond delay="indefinite"/>
+                      </p:stCondLst>
+                      <p:childTnLst>
+                        <p:par>
+                          <p:cTn id="8" fill="hold">
+                            <p:stCondLst>
+                              <p:cond delay="0"/>
+                            </p:stCondLst>
+                            <p:childTnLst>
+                              <p:par>
+                                <p:cTn id="9" presetID="1" presetClass="entr" presetSubtype="0" fill="hold" grpId="0" nodeType="clickEffect">
+                                  <p:stCondLst>
+                                    <p:cond delay="0"/>
+                                  </p:stCondLst>
+                                  <p:childTnLst>
+                                    <p:set>
+                                      <p:cBhvr>
+                                        <p:cTn id="10" dur="1" fill="hold">
+                                          <p:stCondLst>
+                                            <p:cond delay="0"/>
+                                          </p:stCondLst>
+                                        </p:cTn>
+                                        <p:tgtEl>
+                                          <p:spTgt spid="17"/>
+                                        </p:tgtEl>
+                                        <p:attrNameLst>
+                                          <p:attrName>style.visibility</p:attrName>
+                                        </p:attrNameLst>
+                                      </p:cBhvr>
+                                      <p:to>
+                                        <p:strVal val="visible"/>
+                                      </p:to>
+                                    </p:set>
+                                  </p:childTnLst>
+                                </p:cTn>
+                              </p:par>
+                            </p:childTnLst>
+                          </p:cTn>
+                        </p:par>
+                      </p:childTnLst>
+                    </p:cTn>
+                  </p:par>
+                  <p:par>
+                    <p:cTn id="11" fill="hold">
+                      <p:stCondLst>
+                        <p:cond delay="indefinite"/>
+                      </p:stCondLst>
+                      <p:childTnLst>
+                        <p:par>
+                          <p:cTn id="12" fill="hold">
+                            <p:stCondLst>
+                              <p:cond delay="0"/>
+                            </p:stCondLst>
+                            <p:childTnLst>
+                              <p:par>
+                                <p:cTn id="13" presetID="1" presetClass="entr" presetSubtype="0" fill="hold" nodeType="clickEffect">
+                                  <p:stCondLst>
+                                    <p:cond delay="0"/>
+                                  </p:stCondLst>
+                                  <p:childTnLst>
+                                    <p:set>
+                                      <p:cBhvr>
+                                        <p:cTn id="14" dur="1" fill="hold">
+                                          <p:stCondLst>
+                                            <p:cond delay="0"/>
+                                          </p:stCondLst>
+                                        </p:cTn>
+                                        <p:tgtEl>
+                                          <p:spTgt spid="18"/>
+                                        </p:tgtEl>
+                                        <p:attrNameLst>
+                                          <p:attrName>style.visibility</p:attrName>
+                                        </p:attrNameLst>
+                                      </p:cBhvr>
+                                      <p:to>
+                                        <p:strVal val="visible"/>
+                                      </p:to>
+                                    </p:set>
+                                  </p:childTnLst>
+                                </p:cTn>
+                              </p:par>
+                            </p:childTnLst>
+                          </p:cTn>
+                        </p:par>
+                      </p:childTnLst>
+                    </p:cTn>
+                  </p:par>
+                  <p:par>
+                    <p:cTn id="15" fill="hold">
+                      <p:stCondLst>
+                        <p:cond delay="indefinite"/>
+                      </p:stCondLst>
+                      <p:childTnLst>
+                        <p:par>
+                          <p:cTn id="16" fill="hold">
+                            <p:stCondLst>
+                              <p:cond delay="0"/>
+                            </p:stCondLst>
+                            <p:childTnLst>
+                              <p:par>
+                                <p:cTn id="17" presetID="1" presetClass="entr" presetSubtype="0" fill="hold" grpId="0" nodeType="clickEffect">
+                                  <p:stCondLst>
+                                    <p:cond delay="0"/>
+                                  </p:stCondLst>
+                                  <p:childTnLst>
+                                    <p:set>
+                                      <p:cBhvr>
+                                        <p:cTn id="18" dur="1" fill="hold">
+                                          <p:stCondLst>
+                                            <p:cond delay="0"/>
+                                          </p:stCondLst>
+                                        </p:cTn>
+                                        <p:tgtEl>
+                                          <p:spTgt spid="19"/>
+                                        </p:tgtEl>
+                                        <p:attrNameLst>
+                                          <p:attrName>style.visibility</p:attrName>
+                                        </p:attrNameLst>
+                                      </p:cBhvr>
+                                      <p:to>
+                                        <p:strVal val="visible"/>
+                                      </p:to>
+                                    </p:set>
+                                  </p:childTnLst>
+                                </p:cTn>
+                              </p:par>
+                            </p:childTnLst>
+                          </p:cTn>
+                        </p:par>
+                      </p:childTnLst>
+                    </p:cTn>
+                  </p:par>
+                </p:childTnLst>
+              </p:cTn>
+              <p:prevCondLst>
+                <p:cond evt="onPrev" delay="0">
+                  <p:tgtEl>
+                    <p:sldTgt/>
+                  </p:tgtEl>
+                </p:cond>
+              </p:prevCondLst>
+              <p:nextCondLst>
+                <p:cond evt="onNext" delay="0">
+                  <p:tgtEl>
+                    <p:sldTgt/>
+                  </p:tgtEl>
+                </p:cond>
+              </p:nextCondLst>
+            </p:seq>
+          </p:childTnLst>
+        </p:cTn>
+      </p:par>
+    </p:tnLst>
+    <p:bldLst>
+      <p:bldP spid="17" grpId="0"/>
+      <p:bldP spid="19" grpId="0"/>
+    </p:bldLst>
+  </p:timing>
+</p:sld>
+</file>
+
 <file path=ppt/theme/theme1.xml><?xml version="1.0" encoding="utf-8"?>
 <a:theme xmlns:a="http://schemas.openxmlformats.org/drawingml/2006/main" name="Office Theme">
   <a:themeElements>

--- a/2026/2026ThumbnailWhite.pptx
+++ b/2026/2026ThumbnailWhite.pptx
@@ -9,6 +9,8 @@
     <p:sldId id="268" r:id="rId3"/>
     <p:sldId id="269" r:id="rId4"/>
     <p:sldId id="270" r:id="rId5"/>
+    <p:sldId id="271" r:id="rId6"/>
+    <p:sldId id="1286" r:id="rId7"/>
   </p:sldIdLst>
   <p:sldSz cx="12192000" cy="6858000"/>
   <p:notesSz cx="6858000" cy="9144000"/>
@@ -262,7 +264,7 @@
           <a:p>
             <a:fld id="{3816CC03-B68F-4642-A2B8-7A8633A67F21}" type="datetimeFigureOut">
               <a:rPr lang="en-US" smtClean="0"/>
-              <a:t>4/27/2026</a:t>
+              <a:t>7/31/2026</a:t>
             </a:fld>
             <a:endParaRPr lang="en-US"/>
           </a:p>
@@ -460,7 +462,7 @@
           <a:p>
             <a:fld id="{3816CC03-B68F-4642-A2B8-7A8633A67F21}" type="datetimeFigureOut">
               <a:rPr lang="en-US" smtClean="0"/>
-              <a:t>4/27/2026</a:t>
+              <a:t>7/31/2026</a:t>
             </a:fld>
             <a:endParaRPr lang="en-US"/>
           </a:p>
@@ -668,7 +670,7 @@
           <a:p>
             <a:fld id="{3816CC03-B68F-4642-A2B8-7A8633A67F21}" type="datetimeFigureOut">
               <a:rPr lang="en-US" smtClean="0"/>
-              <a:t>4/27/2026</a:t>
+              <a:t>7/31/2026</a:t>
             </a:fld>
             <a:endParaRPr lang="en-US"/>
           </a:p>
@@ -866,7 +868,7 @@
           <a:p>
             <a:fld id="{3816CC03-B68F-4642-A2B8-7A8633A67F21}" type="datetimeFigureOut">
               <a:rPr lang="en-US" smtClean="0"/>
-              <a:t>4/27/2026</a:t>
+              <a:t>7/31/2026</a:t>
             </a:fld>
             <a:endParaRPr lang="en-US"/>
           </a:p>
@@ -1141,7 +1143,7 @@
           <a:p>
             <a:fld id="{3816CC03-B68F-4642-A2B8-7A8633A67F21}" type="datetimeFigureOut">
               <a:rPr lang="en-US" smtClean="0"/>
-              <a:t>4/27/2026</a:t>
+              <a:t>7/31/2026</a:t>
             </a:fld>
             <a:endParaRPr lang="en-US"/>
           </a:p>
@@ -1406,7 +1408,7 @@
           <a:p>
             <a:fld id="{3816CC03-B68F-4642-A2B8-7A8633A67F21}" type="datetimeFigureOut">
               <a:rPr lang="en-US" smtClean="0"/>
-              <a:t>4/27/2026</a:t>
+              <a:t>7/31/2026</a:t>
             </a:fld>
             <a:endParaRPr lang="en-US"/>
           </a:p>
@@ -1818,7 +1820,7 @@
           <a:p>
             <a:fld id="{3816CC03-B68F-4642-A2B8-7A8633A67F21}" type="datetimeFigureOut">
               <a:rPr lang="en-US" smtClean="0"/>
-              <a:t>4/27/2026</a:t>
+              <a:t>7/31/2026</a:t>
             </a:fld>
             <a:endParaRPr lang="en-US"/>
           </a:p>
@@ -1959,7 +1961,7 @@
           <a:p>
             <a:fld id="{3816CC03-B68F-4642-A2B8-7A8633A67F21}" type="datetimeFigureOut">
               <a:rPr lang="en-US" smtClean="0"/>
-              <a:t>4/27/2026</a:t>
+              <a:t>7/31/2026</a:t>
             </a:fld>
             <a:endParaRPr lang="en-US"/>
           </a:p>
@@ -2144,7 +2146,7 @@
           <a:p>
             <a:fld id="{3816CC03-B68F-4642-A2B8-7A8633A67F21}" type="datetimeFigureOut">
               <a:rPr lang="en-US" smtClean="0"/>
-              <a:t>4/27/2026</a:t>
+              <a:t>7/31/2026</a:t>
             </a:fld>
             <a:endParaRPr lang="en-US"/>
           </a:p>
@@ -2455,7 +2457,7 @@
           <a:p>
             <a:fld id="{3816CC03-B68F-4642-A2B8-7A8633A67F21}" type="datetimeFigureOut">
               <a:rPr lang="en-US" smtClean="0"/>
-              <a:t>4/27/2026</a:t>
+              <a:t>7/31/2026</a:t>
             </a:fld>
             <a:endParaRPr lang="en-US"/>
           </a:p>
@@ -2743,7 +2745,7 @@
           <a:p>
             <a:fld id="{3816CC03-B68F-4642-A2B8-7A8633A67F21}" type="datetimeFigureOut">
               <a:rPr lang="en-US" smtClean="0"/>
-              <a:t>4/27/2026</a:t>
+              <a:t>7/31/2026</a:t>
             </a:fld>
             <a:endParaRPr lang="en-US"/>
           </a:p>
@@ -2984,7 +2986,7 @@
           <a:p>
             <a:fld id="{3816CC03-B68F-4642-A2B8-7A8633A67F21}" type="datetimeFigureOut">
               <a:rPr lang="en-US" smtClean="0"/>
-              <a:t>4/27/2026</a:t>
+              <a:t>7/31/2026</a:t>
             </a:fld>
             <a:endParaRPr lang="en-US"/>
           </a:p>
@@ -4683,8 +4685,8 @@
           </a:p>
         </p:txBody>
       </p:sp>
-      <mc:AlternateContent xmlns:mc="http://schemas.openxmlformats.org/markup-compatibility/2006">
-        <mc:Choice xmlns:a14="http://schemas.microsoft.com/office/drawing/2010/main" Requires="a14">
+      <mc:AlternateContent xmlns:mc="http://schemas.openxmlformats.org/markup-compatibility/2006" xmlns:a14="http://schemas.microsoft.com/office/drawing/2010/main">
+        <mc:Choice Requires="a14">
           <p:sp>
             <p:nvSpPr>
               <p:cNvPr id="13" name="TextBox 12">
@@ -4741,7 +4743,7 @@
             </p:txBody>
           </p:sp>
         </mc:Choice>
-        <mc:Fallback>
+        <mc:Fallback xmlns="">
           <p:sp>
             <p:nvSpPr>
               <p:cNvPr id="13" name="TextBox 12">
@@ -4786,8 +4788,8 @@
           </p:sp>
         </mc:Fallback>
       </mc:AlternateContent>
-      <mc:AlternateContent xmlns:mc="http://schemas.openxmlformats.org/markup-compatibility/2006">
-        <mc:Choice xmlns:a14="http://schemas.microsoft.com/office/drawing/2010/main" Requires="a14">
+      <mc:AlternateContent xmlns:mc="http://schemas.openxmlformats.org/markup-compatibility/2006" xmlns:a14="http://schemas.microsoft.com/office/drawing/2010/main">
+        <mc:Choice Requires="a14">
           <p:sp>
             <p:nvSpPr>
               <p:cNvPr id="14" name="TextBox 13">
@@ -4838,7 +4840,7 @@
             </p:txBody>
           </p:sp>
         </mc:Choice>
-        <mc:Fallback>
+        <mc:Fallback xmlns="">
           <p:sp>
             <p:nvSpPr>
               <p:cNvPr id="14" name="TextBox 13">
@@ -5331,6 +5333,507 @@
       <p:bldP spid="19" grpId="0"/>
     </p:bldLst>
   </p:timing>
+</p:sld>
+</file>
+
+<file path=ppt/slides/slide5.xml><?xml version="1.0" encoding="utf-8"?>
+<p:sld xmlns:a="http://schemas.openxmlformats.org/drawingml/2006/main" xmlns:r="http://schemas.openxmlformats.org/officeDocument/2006/relationships" xmlns:p="http://schemas.openxmlformats.org/presentationml/2006/main">
+  <p:cSld>
+    <p:spTree>
+      <p:nvGrpSpPr>
+        <p:cNvPr id="1" name="">
+          <a:extLst>
+            <a:ext uri="{FF2B5EF4-FFF2-40B4-BE49-F238E27FC236}">
+              <a16:creationId xmlns:a16="http://schemas.microsoft.com/office/drawing/2014/main" id="{BB7A2669-74F6-B333-4B65-2BE9896000C3}"/>
+            </a:ext>
+          </a:extLst>
+        </p:cNvPr>
+        <p:cNvGrpSpPr/>
+        <p:nvPr/>
+      </p:nvGrpSpPr>
+      <p:grpSpPr>
+        <a:xfrm>
+          <a:off x="0" y="0"/>
+          <a:ext cx="0" cy="0"/>
+          <a:chOff x="0" y="0"/>
+          <a:chExt cx="0" cy="0"/>
+        </a:xfrm>
+      </p:grpSpPr>
+      <p:pic>
+        <p:nvPicPr>
+          <p:cNvPr id="5" name="Picture 4">
+            <a:extLst>
+              <a:ext uri="{FF2B5EF4-FFF2-40B4-BE49-F238E27FC236}">
+                <a16:creationId xmlns:a16="http://schemas.microsoft.com/office/drawing/2014/main" id="{2892ACB4-D19B-EE22-DFAF-5C7C1CB49FC9}"/>
+              </a:ext>
+            </a:extLst>
+          </p:cNvPr>
+          <p:cNvPicPr>
+            <a:picLocks noChangeAspect="1"/>
+          </p:cNvPicPr>
+          <p:nvPr/>
+        </p:nvPicPr>
+        <p:blipFill>
+          <a:blip r:embed="rId2">
+            <a:extLst>
+              <a:ext uri="{28A0092B-C50C-407E-A947-70E740481C1C}">
+                <a14:useLocalDpi xmlns:a14="http://schemas.microsoft.com/office/drawing/2010/main" val="0"/>
+              </a:ext>
+            </a:extLst>
+          </a:blip>
+          <a:stretch>
+            <a:fillRect/>
+          </a:stretch>
+        </p:blipFill>
+        <p:spPr>
+          <a:xfrm>
+            <a:off x="632829" y="350399"/>
+            <a:ext cx="7732343" cy="2859869"/>
+          </a:xfrm>
+          <a:prstGeom prst="rect">
+            <a:avLst/>
+          </a:prstGeom>
+        </p:spPr>
+      </p:pic>
+      <p:sp>
+        <p:nvSpPr>
+          <p:cNvPr id="7" name="Title 1">
+            <a:extLst>
+              <a:ext uri="{FF2B5EF4-FFF2-40B4-BE49-F238E27FC236}">
+                <a16:creationId xmlns:a16="http://schemas.microsoft.com/office/drawing/2014/main" id="{1E20C704-2F38-1016-217B-013A6676E5FC}"/>
+              </a:ext>
+            </a:extLst>
+          </p:cNvPr>
+          <p:cNvSpPr txBox="1">
+            <a:spLocks/>
+          </p:cNvSpPr>
+          <p:nvPr/>
+        </p:nvSpPr>
+        <p:spPr>
+          <a:xfrm>
+            <a:off x="2099866" y="1388895"/>
+            <a:ext cx="9144000" cy="2387600"/>
+          </a:xfrm>
+          <a:prstGeom prst="rect">
+            <a:avLst/>
+          </a:prstGeom>
+        </p:spPr>
+        <p:txBody>
+          <a:bodyPr vert="horz" lIns="91440" tIns="45720" rIns="91440" bIns="45720" rtlCol="0" anchor="b">
+            <a:normAutofit fontScale="97500"/>
+          </a:bodyPr>
+          <a:lstStyle>
+            <a:lvl1pPr algn="ctr" defTabSz="914400" rtl="0" eaLnBrk="1" latinLnBrk="0" hangingPunct="1">
+              <a:lnSpc>
+                <a:spcPct val="90000"/>
+              </a:lnSpc>
+              <a:spcBef>
+                <a:spcPct val="0"/>
+              </a:spcBef>
+              <a:buNone/>
+              <a:defRPr sz="6000" kern="1200">
+                <a:solidFill>
+                  <a:schemeClr val="tx1"/>
+                </a:solidFill>
+                <a:latin typeface="+mj-lt"/>
+                <a:ea typeface="+mj-ea"/>
+                <a:cs typeface="+mj-cs"/>
+              </a:defRPr>
+            </a:lvl1pPr>
+          </a:lstStyle>
+          <a:p>
+            <a:br>
+              <a:rPr lang="en-US" sz="4800" i="1" dirty="0"/>
+            </a:br>
+            <a:br>
+              <a:rPr lang="en-US" sz="4800" i="1" dirty="0"/>
+            </a:br>
+            <a:r>
+              <a:rPr lang="en-US" sz="4800" i="1" dirty="0"/>
+              <a:t>turning physics inside-out</a:t>
+            </a:r>
+          </a:p>
+        </p:txBody>
+      </p:sp>
+      <p:pic>
+        <p:nvPicPr>
+          <p:cNvPr id="9" name="Picture 8">
+            <a:extLst>
+              <a:ext uri="{FF2B5EF4-FFF2-40B4-BE49-F238E27FC236}">
+                <a16:creationId xmlns:a16="http://schemas.microsoft.com/office/drawing/2014/main" id="{6A8E39D4-90EA-6116-2173-AB97AFC92A31}"/>
+              </a:ext>
+            </a:extLst>
+          </p:cNvPr>
+          <p:cNvPicPr>
+            <a:picLocks noChangeAspect="1"/>
+          </p:cNvPicPr>
+          <p:nvPr/>
+        </p:nvPicPr>
+        <p:blipFill>
+          <a:blip r:embed="rId3">
+            <a:extLst>
+              <a:ext uri="{28A0092B-C50C-407E-A947-70E740481C1C}">
+                <a14:useLocalDpi xmlns:a14="http://schemas.microsoft.com/office/drawing/2010/main" val="0"/>
+              </a:ext>
+            </a:extLst>
+          </a:blip>
+          <a:stretch>
+            <a:fillRect/>
+          </a:stretch>
+        </p:blipFill>
+        <p:spPr>
+          <a:xfrm>
+            <a:off x="9577493" y="4461034"/>
+            <a:ext cx="1891314" cy="2016141"/>
+          </a:xfrm>
+          <a:prstGeom prst="rect">
+            <a:avLst/>
+          </a:prstGeom>
+        </p:spPr>
+      </p:pic>
+      <p:pic>
+        <p:nvPicPr>
+          <p:cNvPr id="11" name="Picture 10">
+            <a:extLst>
+              <a:ext uri="{FF2B5EF4-FFF2-40B4-BE49-F238E27FC236}">
+                <a16:creationId xmlns:a16="http://schemas.microsoft.com/office/drawing/2014/main" id="{EEE4C5C9-DA2D-51EF-371A-35C9EDB84267}"/>
+              </a:ext>
+            </a:extLst>
+          </p:cNvPr>
+          <p:cNvPicPr>
+            <a:picLocks noChangeAspect="1"/>
+          </p:cNvPicPr>
+          <p:nvPr/>
+        </p:nvPicPr>
+        <p:blipFill>
+          <a:blip r:embed="rId4">
+            <a:extLst>
+              <a:ext uri="{28A0092B-C50C-407E-A947-70E740481C1C}">
+                <a14:useLocalDpi xmlns:a14="http://schemas.microsoft.com/office/drawing/2010/main" val="0"/>
+              </a:ext>
+            </a:extLst>
+          </a:blip>
+          <a:stretch>
+            <a:fillRect/>
+          </a:stretch>
+        </p:blipFill>
+        <p:spPr>
+          <a:xfrm>
+            <a:off x="9252605" y="472898"/>
+            <a:ext cx="2555016" cy="1082634"/>
+          </a:xfrm>
+          <a:prstGeom prst="rect">
+            <a:avLst/>
+          </a:prstGeom>
+        </p:spPr>
+      </p:pic>
+      <p:sp>
+        <p:nvSpPr>
+          <p:cNvPr id="12" name="TextBox 11">
+            <a:extLst>
+              <a:ext uri="{FF2B5EF4-FFF2-40B4-BE49-F238E27FC236}">
+                <a16:creationId xmlns:a16="http://schemas.microsoft.com/office/drawing/2014/main" id="{3E67D994-2E00-4A6F-9E84-E4B9C5C0D04E}"/>
+              </a:ext>
+            </a:extLst>
+          </p:cNvPr>
+          <p:cNvSpPr txBox="1"/>
+          <p:nvPr/>
+        </p:nvSpPr>
+        <p:spPr>
+          <a:xfrm>
+            <a:off x="3534946" y="4461034"/>
+            <a:ext cx="5122108" cy="1569660"/>
+          </a:xfrm>
+          <a:prstGeom prst="rect">
+            <a:avLst/>
+          </a:prstGeom>
+          <a:noFill/>
+        </p:spPr>
+        <p:txBody>
+          <a:bodyPr wrap="none" rtlCol="0">
+            <a:spAutoFit/>
+          </a:bodyPr>
+          <a:lstStyle/>
+          <a:p>
+            <a:pPr algn="ctr"/>
+            <a:r>
+              <a:rPr lang="en-US" sz="3200" dirty="0"/>
+              <a:t>Presented at</a:t>
+            </a:r>
+            <a:br>
+              <a:rPr lang="en-US" sz="3200" dirty="0"/>
+            </a:br>
+            <a:r>
+              <a:rPr lang="en-US" sz="3200" dirty="0"/>
+              <a:t>Foundations of Physics 2026</a:t>
+            </a:r>
+          </a:p>
+          <a:p>
+            <a:pPr algn="ctr"/>
+            <a:r>
+              <a:rPr lang="en-US" sz="3200" dirty="0"/>
+              <a:t>University of California, Irvine</a:t>
+            </a:r>
+          </a:p>
+        </p:txBody>
+      </p:sp>
+    </p:spTree>
+    <p:extLst>
+      <p:ext uri="{BB962C8B-B14F-4D97-AF65-F5344CB8AC3E}">
+        <p14:creationId xmlns:p14="http://schemas.microsoft.com/office/powerpoint/2010/main" val="3800963404"/>
+      </p:ext>
+    </p:extLst>
+  </p:cSld>
+  <p:clrMapOvr>
+    <a:masterClrMapping/>
+  </p:clrMapOvr>
+</p:sld>
+</file>
+
+<file path=ppt/slides/slide6.xml><?xml version="1.0" encoding="utf-8"?>
+<p:sld xmlns:a="http://schemas.openxmlformats.org/drawingml/2006/main" xmlns:r="http://schemas.openxmlformats.org/officeDocument/2006/relationships" xmlns:p="http://schemas.openxmlformats.org/presentationml/2006/main">
+  <p:cSld>
+    <p:spTree>
+      <p:nvGrpSpPr>
+        <p:cNvPr id="1" name=""/>
+        <p:cNvGrpSpPr/>
+        <p:nvPr/>
+      </p:nvGrpSpPr>
+      <p:grpSpPr>
+        <a:xfrm>
+          <a:off x="0" y="0"/>
+          <a:ext cx="0" cy="0"/>
+          <a:chOff x="0" y="0"/>
+          <a:chExt cx="0" cy="0"/>
+        </a:xfrm>
+      </p:grpSpPr>
+      <p:sp>
+        <p:nvSpPr>
+          <p:cNvPr id="3" name="Subtitle 2">
+            <a:extLst>
+              <a:ext uri="{FF2B5EF4-FFF2-40B4-BE49-F238E27FC236}">
+                <a16:creationId xmlns:a16="http://schemas.microsoft.com/office/drawing/2014/main" id="{2AB966BA-E88F-9DF9-B52F-C052D3944FD2}"/>
+              </a:ext>
+            </a:extLst>
+          </p:cNvPr>
+          <p:cNvSpPr>
+            <a:spLocks noGrp="1"/>
+          </p:cNvSpPr>
+          <p:nvPr>
+            <p:ph type="subTitle" idx="1"/>
+          </p:nvPr>
+        </p:nvSpPr>
+        <p:spPr>
+          <a:xfrm>
+            <a:off x="1524000" y="4303610"/>
+            <a:ext cx="9144000" cy="1655762"/>
+          </a:xfrm>
+        </p:spPr>
+        <p:txBody>
+          <a:bodyPr/>
+          <a:lstStyle/>
+          <a:p>
+            <a:r>
+              <a:rPr lang="en-US" sz="2400" dirty="0"/>
+              <a:t>Gabriele Carcassi and Christine A. Aidala</a:t>
+            </a:r>
+          </a:p>
+          <a:p>
+            <a:r>
+              <a:rPr lang="en-US" dirty="0"/>
+              <a:t>Physics Department</a:t>
+            </a:r>
+            <a:br>
+              <a:rPr lang="en-US" dirty="0"/>
+            </a:br>
+            <a:r>
+              <a:rPr lang="en-US" dirty="0"/>
+              <a:t>University of Michigan</a:t>
+            </a:r>
+          </a:p>
+          <a:p>
+            <a:endParaRPr lang="en-US" dirty="0"/>
+          </a:p>
+        </p:txBody>
+      </p:sp>
+      <p:pic>
+        <p:nvPicPr>
+          <p:cNvPr id="9" name="Picture 8">
+            <a:extLst>
+              <a:ext uri="{FF2B5EF4-FFF2-40B4-BE49-F238E27FC236}">
+                <a16:creationId xmlns:a16="http://schemas.microsoft.com/office/drawing/2014/main" id="{27DA8297-35B9-5FEA-640F-38C0EA9E4230}"/>
+              </a:ext>
+            </a:extLst>
+          </p:cNvPr>
+          <p:cNvPicPr>
+            <a:picLocks noChangeAspect="1"/>
+          </p:cNvPicPr>
+          <p:nvPr/>
+        </p:nvPicPr>
+        <p:blipFill>
+          <a:blip r:embed="rId2">
+            <a:extLst>
+              <a:ext uri="{28A0092B-C50C-407E-A947-70E740481C1C}">
+                <a14:useLocalDpi xmlns:a14="http://schemas.microsoft.com/office/drawing/2010/main" val="0"/>
+              </a:ext>
+            </a:extLst>
+          </a:blip>
+          <a:stretch>
+            <a:fillRect/>
+          </a:stretch>
+        </p:blipFill>
+        <p:spPr>
+          <a:xfrm>
+            <a:off x="441960" y="4491460"/>
+            <a:ext cx="1891314" cy="2016141"/>
+          </a:xfrm>
+          <a:prstGeom prst="rect">
+            <a:avLst/>
+          </a:prstGeom>
+        </p:spPr>
+      </p:pic>
+      <p:pic>
+        <p:nvPicPr>
+          <p:cNvPr id="4" name="Picture 3">
+            <a:extLst>
+              <a:ext uri="{FF2B5EF4-FFF2-40B4-BE49-F238E27FC236}">
+                <a16:creationId xmlns:a16="http://schemas.microsoft.com/office/drawing/2014/main" id="{E413BA43-F306-19D8-7A6E-AEAEFC0ED942}"/>
+              </a:ext>
+            </a:extLst>
+          </p:cNvPr>
+          <p:cNvPicPr>
+            <a:picLocks noChangeAspect="1"/>
+          </p:cNvPicPr>
+          <p:nvPr/>
+        </p:nvPicPr>
+        <p:blipFill>
+          <a:blip r:embed="rId3">
+            <a:extLst>
+              <a:ext uri="{28A0092B-C50C-407E-A947-70E740481C1C}">
+                <a14:useLocalDpi xmlns:a14="http://schemas.microsoft.com/office/drawing/2010/main" val="0"/>
+              </a:ext>
+            </a:extLst>
+          </a:blip>
+          <a:stretch>
+            <a:fillRect/>
+          </a:stretch>
+        </p:blipFill>
+        <p:spPr>
+          <a:xfrm>
+            <a:off x="632829" y="350399"/>
+            <a:ext cx="7732343" cy="2859869"/>
+          </a:xfrm>
+          <a:prstGeom prst="rect">
+            <a:avLst/>
+          </a:prstGeom>
+        </p:spPr>
+      </p:pic>
+      <p:sp>
+        <p:nvSpPr>
+          <p:cNvPr id="5" name="Title 1">
+            <a:extLst>
+              <a:ext uri="{FF2B5EF4-FFF2-40B4-BE49-F238E27FC236}">
+                <a16:creationId xmlns:a16="http://schemas.microsoft.com/office/drawing/2014/main" id="{63D70913-51AA-A682-920E-37F576D46F53}"/>
+              </a:ext>
+            </a:extLst>
+          </p:cNvPr>
+          <p:cNvSpPr txBox="1">
+            <a:spLocks/>
+          </p:cNvSpPr>
+          <p:nvPr/>
+        </p:nvSpPr>
+        <p:spPr>
+          <a:xfrm>
+            <a:off x="2099866" y="1388895"/>
+            <a:ext cx="9144000" cy="2387600"/>
+          </a:xfrm>
+          <a:prstGeom prst="rect">
+            <a:avLst/>
+          </a:prstGeom>
+        </p:spPr>
+        <p:txBody>
+          <a:bodyPr vert="horz" lIns="91440" tIns="45720" rIns="91440" bIns="45720" rtlCol="0" anchor="b">
+            <a:normAutofit fontScale="97500"/>
+          </a:bodyPr>
+          <a:lstStyle>
+            <a:lvl1pPr algn="ctr" defTabSz="914400" rtl="0" eaLnBrk="1" latinLnBrk="0" hangingPunct="1">
+              <a:lnSpc>
+                <a:spcPct val="90000"/>
+              </a:lnSpc>
+              <a:spcBef>
+                <a:spcPct val="0"/>
+              </a:spcBef>
+              <a:buNone/>
+              <a:defRPr sz="6000" kern="1200">
+                <a:solidFill>
+                  <a:schemeClr val="tx1"/>
+                </a:solidFill>
+                <a:latin typeface="+mj-lt"/>
+                <a:ea typeface="+mj-ea"/>
+                <a:cs typeface="+mj-cs"/>
+              </a:defRPr>
+            </a:lvl1pPr>
+          </a:lstStyle>
+          <a:p>
+            <a:br>
+              <a:rPr lang="en-US" sz="4800" i="1" dirty="0"/>
+            </a:br>
+            <a:br>
+              <a:rPr lang="en-US" sz="4800" i="1" dirty="0"/>
+            </a:br>
+            <a:r>
+              <a:rPr lang="en-US" sz="4800" i="1" dirty="0"/>
+              <a:t>turning physics inside-out</a:t>
+            </a:r>
+          </a:p>
+        </p:txBody>
+      </p:sp>
+      <p:pic>
+        <p:nvPicPr>
+          <p:cNvPr id="6" name="Picture 5">
+            <a:extLst>
+              <a:ext uri="{FF2B5EF4-FFF2-40B4-BE49-F238E27FC236}">
+                <a16:creationId xmlns:a16="http://schemas.microsoft.com/office/drawing/2014/main" id="{C72C4F66-0FED-741F-7BAA-9B292824B437}"/>
+              </a:ext>
+            </a:extLst>
+          </p:cNvPr>
+          <p:cNvPicPr>
+            <a:picLocks noChangeAspect="1"/>
+          </p:cNvPicPr>
+          <p:nvPr/>
+        </p:nvPicPr>
+        <p:blipFill>
+          <a:blip r:embed="rId4">
+            <a:extLst>
+              <a:ext uri="{28A0092B-C50C-407E-A947-70E740481C1C}">
+                <a14:useLocalDpi xmlns:a14="http://schemas.microsoft.com/office/drawing/2010/main" val="0"/>
+              </a:ext>
+            </a:extLst>
+          </a:blip>
+          <a:stretch>
+            <a:fillRect/>
+          </a:stretch>
+        </p:blipFill>
+        <p:spPr>
+          <a:xfrm>
+            <a:off x="9252605" y="472898"/>
+            <a:ext cx="2555016" cy="1082634"/>
+          </a:xfrm>
+          <a:prstGeom prst="rect">
+            <a:avLst/>
+          </a:prstGeom>
+        </p:spPr>
+      </p:pic>
+    </p:spTree>
+    <p:extLst>
+      <p:ext uri="{BB962C8B-B14F-4D97-AF65-F5344CB8AC3E}">
+        <p14:creationId xmlns:p14="http://schemas.microsoft.com/office/powerpoint/2010/main" val="3259907365"/>
+      </p:ext>
+    </p:extLst>
+  </p:cSld>
+  <p:clrMapOvr>
+    <a:masterClrMapping/>
+  </p:clrMapOvr>
 </p:sld>
 </file>
 

--- a/2026/2026ThumbnailWhite.pptx
+++ b/2026/2026ThumbnailWhite.pptx
@@ -10,7 +10,6 @@
     <p:sldId id="269" r:id="rId4"/>
     <p:sldId id="270" r:id="rId5"/>
     <p:sldId id="271" r:id="rId6"/>
-    <p:sldId id="1286" r:id="rId7"/>
   </p:sldIdLst>
   <p:sldSz cx="12192000" cy="6858000"/>
   <p:notesSz cx="6858000" cy="9144000"/>
@@ -5590,253 +5589,6 @@
 </p:sld>
 </file>
 
-<file path=ppt/slides/slide6.xml><?xml version="1.0" encoding="utf-8"?>
-<p:sld xmlns:a="http://schemas.openxmlformats.org/drawingml/2006/main" xmlns:r="http://schemas.openxmlformats.org/officeDocument/2006/relationships" xmlns:p="http://schemas.openxmlformats.org/presentationml/2006/main">
-  <p:cSld>
-    <p:spTree>
-      <p:nvGrpSpPr>
-        <p:cNvPr id="1" name=""/>
-        <p:cNvGrpSpPr/>
-        <p:nvPr/>
-      </p:nvGrpSpPr>
-      <p:grpSpPr>
-        <a:xfrm>
-          <a:off x="0" y="0"/>
-          <a:ext cx="0" cy="0"/>
-          <a:chOff x="0" y="0"/>
-          <a:chExt cx="0" cy="0"/>
-        </a:xfrm>
-      </p:grpSpPr>
-      <p:sp>
-        <p:nvSpPr>
-          <p:cNvPr id="3" name="Subtitle 2">
-            <a:extLst>
-              <a:ext uri="{FF2B5EF4-FFF2-40B4-BE49-F238E27FC236}">
-                <a16:creationId xmlns:a16="http://schemas.microsoft.com/office/drawing/2014/main" id="{2AB966BA-E88F-9DF9-B52F-C052D3944FD2}"/>
-              </a:ext>
-            </a:extLst>
-          </p:cNvPr>
-          <p:cNvSpPr>
-            <a:spLocks noGrp="1"/>
-          </p:cNvSpPr>
-          <p:nvPr>
-            <p:ph type="subTitle" idx="1"/>
-          </p:nvPr>
-        </p:nvSpPr>
-        <p:spPr>
-          <a:xfrm>
-            <a:off x="1524000" y="4303610"/>
-            <a:ext cx="9144000" cy="1655762"/>
-          </a:xfrm>
-        </p:spPr>
-        <p:txBody>
-          <a:bodyPr/>
-          <a:lstStyle/>
-          <a:p>
-            <a:r>
-              <a:rPr lang="en-US" sz="2400" dirty="0"/>
-              <a:t>Gabriele Carcassi and Christine A. Aidala</a:t>
-            </a:r>
-          </a:p>
-          <a:p>
-            <a:r>
-              <a:rPr lang="en-US" dirty="0"/>
-              <a:t>Physics Department</a:t>
-            </a:r>
-            <a:br>
-              <a:rPr lang="en-US" dirty="0"/>
-            </a:br>
-            <a:r>
-              <a:rPr lang="en-US" dirty="0"/>
-              <a:t>University of Michigan</a:t>
-            </a:r>
-          </a:p>
-          <a:p>
-            <a:endParaRPr lang="en-US" dirty="0"/>
-          </a:p>
-        </p:txBody>
-      </p:sp>
-      <p:pic>
-        <p:nvPicPr>
-          <p:cNvPr id="9" name="Picture 8">
-            <a:extLst>
-              <a:ext uri="{FF2B5EF4-FFF2-40B4-BE49-F238E27FC236}">
-                <a16:creationId xmlns:a16="http://schemas.microsoft.com/office/drawing/2014/main" id="{27DA8297-35B9-5FEA-640F-38C0EA9E4230}"/>
-              </a:ext>
-            </a:extLst>
-          </p:cNvPr>
-          <p:cNvPicPr>
-            <a:picLocks noChangeAspect="1"/>
-          </p:cNvPicPr>
-          <p:nvPr/>
-        </p:nvPicPr>
-        <p:blipFill>
-          <a:blip r:embed="rId2">
-            <a:extLst>
-              <a:ext uri="{28A0092B-C50C-407E-A947-70E740481C1C}">
-                <a14:useLocalDpi xmlns:a14="http://schemas.microsoft.com/office/drawing/2010/main" val="0"/>
-              </a:ext>
-            </a:extLst>
-          </a:blip>
-          <a:stretch>
-            <a:fillRect/>
-          </a:stretch>
-        </p:blipFill>
-        <p:spPr>
-          <a:xfrm>
-            <a:off x="441960" y="4491460"/>
-            <a:ext cx="1891314" cy="2016141"/>
-          </a:xfrm>
-          <a:prstGeom prst="rect">
-            <a:avLst/>
-          </a:prstGeom>
-        </p:spPr>
-      </p:pic>
-      <p:pic>
-        <p:nvPicPr>
-          <p:cNvPr id="4" name="Picture 3">
-            <a:extLst>
-              <a:ext uri="{FF2B5EF4-FFF2-40B4-BE49-F238E27FC236}">
-                <a16:creationId xmlns:a16="http://schemas.microsoft.com/office/drawing/2014/main" id="{E413BA43-F306-19D8-7A6E-AEAEFC0ED942}"/>
-              </a:ext>
-            </a:extLst>
-          </p:cNvPr>
-          <p:cNvPicPr>
-            <a:picLocks noChangeAspect="1"/>
-          </p:cNvPicPr>
-          <p:nvPr/>
-        </p:nvPicPr>
-        <p:blipFill>
-          <a:blip r:embed="rId3">
-            <a:extLst>
-              <a:ext uri="{28A0092B-C50C-407E-A947-70E740481C1C}">
-                <a14:useLocalDpi xmlns:a14="http://schemas.microsoft.com/office/drawing/2010/main" val="0"/>
-              </a:ext>
-            </a:extLst>
-          </a:blip>
-          <a:stretch>
-            <a:fillRect/>
-          </a:stretch>
-        </p:blipFill>
-        <p:spPr>
-          <a:xfrm>
-            <a:off x="632829" y="350399"/>
-            <a:ext cx="7732343" cy="2859869"/>
-          </a:xfrm>
-          <a:prstGeom prst="rect">
-            <a:avLst/>
-          </a:prstGeom>
-        </p:spPr>
-      </p:pic>
-      <p:sp>
-        <p:nvSpPr>
-          <p:cNvPr id="5" name="Title 1">
-            <a:extLst>
-              <a:ext uri="{FF2B5EF4-FFF2-40B4-BE49-F238E27FC236}">
-                <a16:creationId xmlns:a16="http://schemas.microsoft.com/office/drawing/2014/main" id="{63D70913-51AA-A682-920E-37F576D46F53}"/>
-              </a:ext>
-            </a:extLst>
-          </p:cNvPr>
-          <p:cNvSpPr txBox="1">
-            <a:spLocks/>
-          </p:cNvSpPr>
-          <p:nvPr/>
-        </p:nvSpPr>
-        <p:spPr>
-          <a:xfrm>
-            <a:off x="2099866" y="1388895"/>
-            <a:ext cx="9144000" cy="2387600"/>
-          </a:xfrm>
-          <a:prstGeom prst="rect">
-            <a:avLst/>
-          </a:prstGeom>
-        </p:spPr>
-        <p:txBody>
-          <a:bodyPr vert="horz" lIns="91440" tIns="45720" rIns="91440" bIns="45720" rtlCol="0" anchor="b">
-            <a:normAutofit fontScale="97500"/>
-          </a:bodyPr>
-          <a:lstStyle>
-            <a:lvl1pPr algn="ctr" defTabSz="914400" rtl="0" eaLnBrk="1" latinLnBrk="0" hangingPunct="1">
-              <a:lnSpc>
-                <a:spcPct val="90000"/>
-              </a:lnSpc>
-              <a:spcBef>
-                <a:spcPct val="0"/>
-              </a:spcBef>
-              <a:buNone/>
-              <a:defRPr sz="6000" kern="1200">
-                <a:solidFill>
-                  <a:schemeClr val="tx1"/>
-                </a:solidFill>
-                <a:latin typeface="+mj-lt"/>
-                <a:ea typeface="+mj-ea"/>
-                <a:cs typeface="+mj-cs"/>
-              </a:defRPr>
-            </a:lvl1pPr>
-          </a:lstStyle>
-          <a:p>
-            <a:br>
-              <a:rPr lang="en-US" sz="4800" i="1" dirty="0"/>
-            </a:br>
-            <a:br>
-              <a:rPr lang="en-US" sz="4800" i="1" dirty="0"/>
-            </a:br>
-            <a:r>
-              <a:rPr lang="en-US" sz="4800" i="1" dirty="0"/>
-              <a:t>turning physics inside-out</a:t>
-            </a:r>
-          </a:p>
-        </p:txBody>
-      </p:sp>
-      <p:pic>
-        <p:nvPicPr>
-          <p:cNvPr id="6" name="Picture 5">
-            <a:extLst>
-              <a:ext uri="{FF2B5EF4-FFF2-40B4-BE49-F238E27FC236}">
-                <a16:creationId xmlns:a16="http://schemas.microsoft.com/office/drawing/2014/main" id="{C72C4F66-0FED-741F-7BAA-9B292824B437}"/>
-              </a:ext>
-            </a:extLst>
-          </p:cNvPr>
-          <p:cNvPicPr>
-            <a:picLocks noChangeAspect="1"/>
-          </p:cNvPicPr>
-          <p:nvPr/>
-        </p:nvPicPr>
-        <p:blipFill>
-          <a:blip r:embed="rId4">
-            <a:extLst>
-              <a:ext uri="{28A0092B-C50C-407E-A947-70E740481C1C}">
-                <a14:useLocalDpi xmlns:a14="http://schemas.microsoft.com/office/drawing/2010/main" val="0"/>
-              </a:ext>
-            </a:extLst>
-          </a:blip>
-          <a:stretch>
-            <a:fillRect/>
-          </a:stretch>
-        </p:blipFill>
-        <p:spPr>
-          <a:xfrm>
-            <a:off x="9252605" y="472898"/>
-            <a:ext cx="2555016" cy="1082634"/>
-          </a:xfrm>
-          <a:prstGeom prst="rect">
-            <a:avLst/>
-          </a:prstGeom>
-        </p:spPr>
-      </p:pic>
-    </p:spTree>
-    <p:extLst>
-      <p:ext uri="{BB962C8B-B14F-4D97-AF65-F5344CB8AC3E}">
-        <p14:creationId xmlns:p14="http://schemas.microsoft.com/office/powerpoint/2010/main" val="3259907365"/>
-      </p:ext>
-    </p:extLst>
-  </p:cSld>
-  <p:clrMapOvr>
-    <a:masterClrMapping/>
-  </p:clrMapOvr>
-</p:sld>
-</file>
-
 <file path=ppt/theme/theme1.xml><?xml version="1.0" encoding="utf-8"?>
 <a:theme xmlns:a="http://schemas.openxmlformats.org/drawingml/2006/main" name="Office Theme">
   <a:themeElements>
